--- a/sjoskolan/vecka-44/aktuell/v44_02_Hogspanningssystem_elev.pptx
+++ b/sjoskolan/vecka-44/aktuell/v44_02_Hogspanningssystem_elev.pptx
@@ -4516,7 +4516,7 @@
       </p:sp>
       <p:sp>
         <p:nvSpPr>
-          <p:cNvPr id="10" name="Iᴸ = P/(√3 · Uᴸ · PF)">
+          <p:cNvPr id="10" name="IL = P/(√3 · UL · PF)">
             <a:extLst xmlns:a="http://schemas.openxmlformats.org/drawingml/2006/main">
               <a:ext uri="{FF2B5EF4-FFF2-40B4-BE49-F238E27FC236}">
                 <a16:creationId xmlns:a16="http://schemas.microsoft.com/office/drawing/2014/main" id="{80978B88-48A5-4BF7-92C5-5D3E60B4BEFF}"/>
@@ -4566,14 +4566,58 @@
                 <a:ea typeface="Calibri"/>
                 <a:cs typeface="Calibri"/>
               </a:rPr>
-              <a:t>Iᴸ = P/(√3 · Uᴸ · PF)</a:t>
-            </a:r>
-          </a:p>
-        </p:txBody>
-      </p:sp>
-      <p:sp>
-        <p:nvSpPr>
-          <p:cNvPr id="11" name="P är aktiv trefaseffekt i W. Uᴸ är linjespänning i V RMS och Iᴸ l">
+              <a:t>I</a:t>
+            </a:r>
+            <a:r>
+              <a:rPr sz="2400" b="1" baseline="-25000">
+                <a:solidFill>
+                  <a:srgbClr val="064F91"/>
+                </a:solidFill>
+                <a:latin typeface="Calibri"/>
+                <a:ea typeface="Calibri"/>
+                <a:cs typeface="Calibri"/>
+              </a:rPr>
+              <a:t>L</a:t>
+            </a:r>
+            <a:r>
+              <a:rPr sz="2400" b="1">
+                <a:solidFill>
+                  <a:srgbClr val="064F91"/>
+                </a:solidFill>
+                <a:latin typeface="Calibri"/>
+                <a:ea typeface="Calibri"/>
+                <a:cs typeface="Calibri"/>
+              </a:rPr>
+              <a:t> = P/(√3 · U</a:t>
+            </a:r>
+            <a:r>
+              <a:rPr sz="2400" b="1" baseline="-25000">
+                <a:solidFill>
+                  <a:srgbClr val="064F91"/>
+                </a:solidFill>
+                <a:latin typeface="Calibri"/>
+                <a:ea typeface="Calibri"/>
+                <a:cs typeface="Calibri"/>
+              </a:rPr>
+              <a:t>L</a:t>
+            </a:r>
+            <a:r>
+              <a:rPr sz="2400" b="1">
+                <a:solidFill>
+                  <a:srgbClr val="064F91"/>
+                </a:solidFill>
+                <a:latin typeface="Calibri"/>
+                <a:ea typeface="Calibri"/>
+                <a:cs typeface="Calibri"/>
+              </a:rPr>
+              <a:t> · PF)</a:t>
+            </a:r>
+          </a:p>
+        </p:txBody>
+      </p:sp>
+      <p:sp>
+        <p:nvSpPr>
+          <p:cNvPr id="11" name="P är aktiv trefaseffekt i W. UL är linjespänning i V RMS och IL l">
             <a:extLst xmlns:a="http://schemas.openxmlformats.org/drawingml/2006/main">
               <a:ext uri="{FF2B5EF4-FFF2-40B4-BE49-F238E27FC236}">
                 <a16:creationId xmlns:a16="http://schemas.microsoft.com/office/drawing/2014/main" id="{83CA6F10-0C3B-4E17-B4AF-855625784125}"/>
@@ -4623,14 +4667,58 @@
                 <a:ea typeface="Calibri"/>
                 <a:cs typeface="Calibri"/>
               </a:rPr>
-              <a:t>P är aktiv trefaseffekt i W. Uᴸ är linjespänning i V RMS och Iᴸ linjeström i A RMS.</a:t>
-            </a:r>
-          </a:p>
-        </p:txBody>
-      </p:sp>
-      <p:sp>
-        <p:nvSpPr>
-          <p:cNvPr id="12" name="Förutsättningar: Symmetrisk last: P = 1,0 MW, Uᴸ = 6,6 kV, PF = 0">
+              <a:t>P är aktiv trefaseffekt i W. U</a:t>
+            </a:r>
+            <a:r>
+              <a:rPr sz="2100" b="0" baseline="-25000">
+                <a:solidFill>
+                  <a:srgbClr val="111111"/>
+                </a:solidFill>
+                <a:latin typeface="Calibri"/>
+                <a:ea typeface="Calibri"/>
+                <a:cs typeface="Calibri"/>
+              </a:rPr>
+              <a:t>L</a:t>
+            </a:r>
+            <a:r>
+              <a:rPr sz="2100" b="0">
+                <a:solidFill>
+                  <a:srgbClr val="111111"/>
+                </a:solidFill>
+                <a:latin typeface="Calibri"/>
+                <a:ea typeface="Calibri"/>
+                <a:cs typeface="Calibri"/>
+              </a:rPr>
+              <a:t> är linjespänning i V RMS och I</a:t>
+            </a:r>
+            <a:r>
+              <a:rPr sz="2100" b="0" baseline="-25000">
+                <a:solidFill>
+                  <a:srgbClr val="111111"/>
+                </a:solidFill>
+                <a:latin typeface="Calibri"/>
+                <a:ea typeface="Calibri"/>
+                <a:cs typeface="Calibri"/>
+              </a:rPr>
+              <a:t>L</a:t>
+            </a:r>
+            <a:r>
+              <a:rPr sz="2100" b="0">
+                <a:solidFill>
+                  <a:srgbClr val="111111"/>
+                </a:solidFill>
+                <a:latin typeface="Calibri"/>
+                <a:ea typeface="Calibri"/>
+                <a:cs typeface="Calibri"/>
+              </a:rPr>
+              <a:t> linjeström i A RMS.</a:t>
+            </a:r>
+          </a:p>
+        </p:txBody>
+      </p:sp>
+      <p:sp>
+        <p:nvSpPr>
+          <p:cNvPr id="12" name="Förutsättningar: Symmetrisk last: P = 1,0 MW, UL = 6,6 kV, PF = 0">
             <a:extLst xmlns:a="http://schemas.openxmlformats.org/drawingml/2006/main">
               <a:ext uri="{FF2B5EF4-FFF2-40B4-BE49-F238E27FC236}">
                 <a16:creationId xmlns:a16="http://schemas.microsoft.com/office/drawing/2014/main" id="{0579A9AC-FC06-4DDF-B6B1-C4CBBB742AD5}"/>
@@ -4680,7 +4768,29 @@
                 <a:ea typeface="Calibri"/>
                 <a:cs typeface="Calibri"/>
               </a:rPr>
-              <a:t>Förutsättningar: Symmetrisk last: P = 1,0 MW, Uᴸ = 6,6 kV, PF = 0,90.</a:t>
+              <a:t>Förutsättningar: Symmetrisk last: P = 1,0 MW, U</a:t>
+            </a:r>
+            <a:r>
+              <a:rPr sz="2025" b="0" baseline="-25000">
+                <a:solidFill>
+                  <a:srgbClr val="111111"/>
+                </a:solidFill>
+                <a:latin typeface="Calibri"/>
+                <a:ea typeface="Calibri"/>
+                <a:cs typeface="Calibri"/>
+              </a:rPr>
+              <a:t>L</a:t>
+            </a:r>
+            <a:r>
+              <a:rPr sz="2025" b="0">
+                <a:solidFill>
+                  <a:srgbClr val="111111"/>
+                </a:solidFill>
+                <a:latin typeface="Calibri"/>
+                <a:ea typeface="Calibri"/>
+                <a:cs typeface="Calibri"/>
+              </a:rPr>
+              <a:t> = 6,6 kV, PF = 0,90.</a:t>
             </a:r>
           </a:p>
         </p:txBody>
@@ -4963,7 +5073,7 @@
       </p:sp>
       <p:sp>
         <p:nvSpPr>
-          <p:cNvPr id="4" name="En symmetrisk trefaslast tar P = 1,0 MW vid Uᴸ = 6,6 kV och PF = ">
+          <p:cNvPr id="4" name="En symmetrisk trefaslast tar P = 1,0 MW vid UL = 6,6 kV och PF = ">
             <a:extLst xmlns:a="http://schemas.openxmlformats.org/drawingml/2006/main">
               <a:ext uri="{FF2B5EF4-FFF2-40B4-BE49-F238E27FC236}">
                 <a16:creationId xmlns:a16="http://schemas.microsoft.com/office/drawing/2014/main" id="{4D854ED4-A511-4F54-B916-56FA57246BF7}"/>
@@ -5014,7 +5124,29 @@
                 <a:ea typeface="Calibri"/>
                 <a:cs typeface="Calibri"/>
               </a:rPr>
-              <a:t>En symmetrisk trefaslast tar P = 1,0 MW vid Uᴸ = 6,6 kV och PF = 0,90. Beräkna linjeström.</a:t>
+              <a:t>En symmetrisk trefaslast tar P = 1,0 MW vid U</a:t>
+            </a:r>
+            <a:r>
+              <a:rPr sz="2400" b="0" baseline="-25000">
+                <a:solidFill>
+                  <a:srgbClr val="111111"/>
+                </a:solidFill>
+                <a:latin typeface="Calibri"/>
+                <a:ea typeface="Calibri"/>
+                <a:cs typeface="Calibri"/>
+              </a:rPr>
+              <a:t>L</a:t>
+            </a:r>
+            <a:r>
+              <a:rPr sz="2400" b="0">
+                <a:solidFill>
+                  <a:srgbClr val="111111"/>
+                </a:solidFill>
+                <a:latin typeface="Calibri"/>
+                <a:ea typeface="Calibri"/>
+                <a:cs typeface="Calibri"/>
+              </a:rPr>
+              <a:t> = 6,6 kV och PF = 0,90. Beräkna linjeström.</a:t>
             </a:r>
           </a:p>
         </p:txBody>
@@ -5240,7 +5372,7 @@
       </p:sp>
       <p:sp>
         <p:nvSpPr>
-          <p:cNvPr id="10" name="Iᴸ = P/(√3 UᴸPF)&#10;Ilåg/Ihög = Uhög/Ulåg">
+          <p:cNvPr id="10" name="IL = P/(√3 ULPF)&#10;Ilåg/Ihög = Uhög/Ulåg">
             <a:extLst xmlns:a="http://schemas.openxmlformats.org/drawingml/2006/main">
               <a:ext uri="{FF2B5EF4-FFF2-40B4-BE49-F238E27FC236}">
                 <a16:creationId xmlns:a16="http://schemas.microsoft.com/office/drawing/2014/main" id="{1473E153-5FDB-44E6-9997-DF2171CE6BC7}"/>
@@ -5290,7 +5422,51 @@
                 <a:ea typeface="Calibri"/>
                 <a:cs typeface="Calibri"/>
               </a:rPr>
-              <a:t>Iᴸ = P/(√3 UᴸPF)</a:t>
+              <a:t>I</a:t>
+            </a:r>
+            <a:r>
+              <a:rPr sz="2400" b="1" baseline="-25000">
+                <a:solidFill>
+                  <a:srgbClr val="064F91"/>
+                </a:solidFill>
+                <a:latin typeface="Calibri"/>
+                <a:ea typeface="Calibri"/>
+                <a:cs typeface="Calibri"/>
+              </a:rPr>
+              <a:t>L</a:t>
+            </a:r>
+            <a:r>
+              <a:rPr sz="2400" b="1">
+                <a:solidFill>
+                  <a:srgbClr val="064F91"/>
+                </a:solidFill>
+                <a:latin typeface="Calibri"/>
+                <a:ea typeface="Calibri"/>
+                <a:cs typeface="Calibri"/>
+              </a:rPr>
+              <a:t> = P/(√3 U</a:t>
+            </a:r>
+            <a:r>
+              <a:rPr sz="2400" b="1" baseline="-25000">
+                <a:solidFill>
+                  <a:srgbClr val="064F91"/>
+                </a:solidFill>
+                <a:latin typeface="Calibri"/>
+                <a:ea typeface="Calibri"/>
+                <a:cs typeface="Calibri"/>
+              </a:rPr>
+              <a:t>L</a:t>
+            </a:r>
+            <a:r>
+              <a:rPr sz="2400" b="1">
+                <a:solidFill>
+                  <a:srgbClr val="064F91"/>
+                </a:solidFill>
+                <a:latin typeface="Calibri"/>
+                <a:ea typeface="Calibri"/>
+                <a:cs typeface="Calibri"/>
+              </a:rPr>
+              <a:t>PF)</a:t>
             </a:r>
           </a:p>
           <a:p xmlns:a="http://schemas.openxmlformats.org/drawingml/2006/main">
@@ -5313,7 +5489,117 @@
                 <a:ea typeface="Calibri"/>
                 <a:cs typeface="Calibri"/>
               </a:rPr>
-              <a:t>Ilåg/Ihög = Uhög/Ulåg</a:t>
+              <a:t>I</a:t>
+            </a:r>
+            <a:r>
+              <a:rPr sz="2400" b="1" baseline="-25000">
+                <a:solidFill>
+                  <a:srgbClr val="064F91"/>
+                </a:solidFill>
+                <a:latin typeface="Calibri"/>
+                <a:ea typeface="Calibri"/>
+                <a:cs typeface="Calibri"/>
+              </a:rPr>
+              <a:t>låg</a:t>
+            </a:r>
+            <a:r>
+              <a:rPr sz="2400" b="1">
+                <a:solidFill>
+                  <a:srgbClr val="064F91"/>
+                </a:solidFill>
+                <a:latin typeface="Calibri"/>
+                <a:ea typeface="Calibri"/>
+                <a:cs typeface="Calibri"/>
+              </a:rPr>
+              <a:t>/</a:t>
+            </a:r>
+            <a:r>
+              <a:rPr sz="2400" b="1">
+                <a:solidFill>
+                  <a:srgbClr val="064F91"/>
+                </a:solidFill>
+                <a:latin typeface="Calibri"/>
+                <a:ea typeface="Calibri"/>
+                <a:cs typeface="Calibri"/>
+              </a:rPr>
+              <a:t>I</a:t>
+            </a:r>
+            <a:r>
+              <a:rPr sz="2400" b="1" baseline="-25000">
+                <a:solidFill>
+                  <a:srgbClr val="064F91"/>
+                </a:solidFill>
+                <a:latin typeface="Calibri"/>
+                <a:ea typeface="Calibri"/>
+                <a:cs typeface="Calibri"/>
+              </a:rPr>
+              <a:t>hög</a:t>
+            </a:r>
+            <a:r>
+              <a:rPr sz="2400" b="1">
+                <a:solidFill>
+                  <a:srgbClr val="064F91"/>
+                </a:solidFill>
+                <a:latin typeface="Calibri"/>
+                <a:ea typeface="Calibri"/>
+                <a:cs typeface="Calibri"/>
+              </a:rPr>
+              <a:t> = </a:t>
+            </a:r>
+            <a:r>
+              <a:rPr sz="2400" b="1">
+                <a:solidFill>
+                  <a:srgbClr val="064F91"/>
+                </a:solidFill>
+                <a:latin typeface="Calibri"/>
+                <a:ea typeface="Calibri"/>
+                <a:cs typeface="Calibri"/>
+              </a:rPr>
+              <a:t>U</a:t>
+            </a:r>
+            <a:r>
+              <a:rPr sz="2400" b="1" baseline="-25000">
+                <a:solidFill>
+                  <a:srgbClr val="064F91"/>
+                </a:solidFill>
+                <a:latin typeface="Calibri"/>
+                <a:ea typeface="Calibri"/>
+                <a:cs typeface="Calibri"/>
+              </a:rPr>
+              <a:t>hög</a:t>
+            </a:r>
+            <a:r>
+              <a:rPr sz="2400" b="1">
+                <a:solidFill>
+                  <a:srgbClr val="064F91"/>
+                </a:solidFill>
+                <a:latin typeface="Calibri"/>
+                <a:ea typeface="Calibri"/>
+                <a:cs typeface="Calibri"/>
+              </a:rPr>
+              <a:t>/</a:t>
+            </a:r>
+            <a:r>
+              <a:rPr sz="2400" b="1">
+                <a:solidFill>
+                  <a:srgbClr val="064F91"/>
+                </a:solidFill>
+                <a:latin typeface="Calibri"/>
+                <a:ea typeface="Calibri"/>
+                <a:cs typeface="Calibri"/>
+              </a:rPr>
+              <a:t>U</a:t>
+            </a:r>
+            <a:r>
+              <a:rPr sz="2400" b="1" baseline="-25000">
+                <a:solidFill>
+                  <a:srgbClr val="064F91"/>
+                </a:solidFill>
+                <a:latin typeface="Calibri"/>
+                <a:ea typeface="Calibri"/>
+                <a:cs typeface="Calibri"/>
+              </a:rPr>
+              <a:t>låg</a:t>
             </a:r>
           </a:p>
         </p:txBody>
@@ -6037,7 +6323,51 @@
                 <a:ea typeface="Calibri"/>
                 <a:cs typeface="Calibri"/>
               </a:rPr>
-              <a:t>kI = I₁,märk/I₂,märk     I₂ = I₁/kI</a:t>
+              <a:t>k</a:t>
+            </a:r>
+            <a:r>
+              <a:rPr sz="2400" b="1" baseline="-25000">
+                <a:solidFill>
+                  <a:srgbClr val="064F91"/>
+                </a:solidFill>
+                <a:latin typeface="Calibri"/>
+                <a:ea typeface="Calibri"/>
+                <a:cs typeface="Calibri"/>
+              </a:rPr>
+              <a:t>I</a:t>
+            </a:r>
+            <a:r>
+              <a:rPr sz="2400" b="1">
+                <a:solidFill>
+                  <a:srgbClr val="064F91"/>
+                </a:solidFill>
+                <a:latin typeface="Calibri"/>
+                <a:ea typeface="Calibri"/>
+                <a:cs typeface="Calibri"/>
+              </a:rPr>
+              <a:t> = I₁,märk/I₂,märk     I₂ = I₁/</a:t>
+            </a:r>
+            <a:r>
+              <a:rPr sz="2400" b="1">
+                <a:solidFill>
+                  <a:srgbClr val="064F91"/>
+                </a:solidFill>
+                <a:latin typeface="Calibri"/>
+                <a:ea typeface="Calibri"/>
+                <a:cs typeface="Calibri"/>
+              </a:rPr>
+              <a:t>k</a:t>
+            </a:r>
+            <a:r>
+              <a:rPr sz="2400" b="1" baseline="-25000">
+                <a:solidFill>
+                  <a:srgbClr val="064F91"/>
+                </a:solidFill>
+                <a:latin typeface="Calibri"/>
+                <a:ea typeface="Calibri"/>
+                <a:cs typeface="Calibri"/>
+              </a:rPr>
+              <a:t>I</a:t>
             </a:r>
           </a:p>
         </p:txBody>
@@ -6094,7 +6424,29 @@
                 <a:ea typeface="Calibri"/>
                 <a:cs typeface="Calibri"/>
               </a:rPr>
-              <a:t>kI är strömomsättning utan enhet. Index 1 är primär och 2 sekundär.</a:t>
+              <a:t>k</a:t>
+            </a:r>
+            <a:r>
+              <a:rPr sz="2100" b="0" baseline="-25000">
+                <a:solidFill>
+                  <a:srgbClr val="111111"/>
+                </a:solidFill>
+                <a:latin typeface="Calibri"/>
+                <a:ea typeface="Calibri"/>
+                <a:cs typeface="Calibri"/>
+              </a:rPr>
+              <a:t>I</a:t>
+            </a:r>
+            <a:r>
+              <a:rPr sz="2100" b="0">
+                <a:solidFill>
+                  <a:srgbClr val="111111"/>
+                </a:solidFill>
+                <a:latin typeface="Calibri"/>
+                <a:ea typeface="Calibri"/>
+                <a:cs typeface="Calibri"/>
+              </a:rPr>
+              <a:t> är strömomsättning utan enhet. Index 1 är primär och 2 sekundär.</a:t>
             </a:r>
           </a:p>
         </p:txBody>
@@ -6449,7 +6801,7 @@
         <p:spPr>
           <a:xfrm xmlns:a="http://schemas.openxmlformats.org/drawingml/2006/main">
             <a:off x="762000" y="2533650"/>
-            <a:ext cx="7620000" cy="2286000"/>
+            <a:ext cx="3886200" cy="2606040"/>
           </a:xfrm>
           <a:prstGeom xmlns:a="http://schemas.openxmlformats.org/drawingml/2006/main" prst="rect">
             <a:avLst/>
@@ -6485,7 +6837,7 @@
                 <a:ea typeface="Calibri"/>
                 <a:cs typeface="Calibri"/>
               </a:rPr>
-              <a:t>En ideal strömtransformator har omsättningen 200/5 A. Primärströmmen är 120 A. Beräkna sekundärström.</a:t>
+              <a:t>En ideal strömtransformator har omsättningen 200/5 A. Primärströmmen är 120 A. Beräkna sekundärström.</a:t>
             </a:r>
           </a:p>
         </p:txBody>
@@ -6606,6 +6958,30 @@
           </a:p>
         </p:txBody>
       </p:sp>
+      <p:pic xmlns:a="http://schemas.openxmlformats.org/drawingml/2006/main" xmlns:r="http://schemas.openxmlformats.org/officeDocument/2006/relationships">
+        <p:nvPicPr>
+          <p:cNvPr id="9" name="Figur: Strömtransformator 200/5 A med primärstr" descr="Strömtransformator 200/5 A med primärström 120 A; sekundärströmmen okänd"/>
+          <p:cNvPicPr>
+            <a:picLocks noChangeAspect="1"/>
+          </p:cNvPicPr>
+          <p:nvPr/>
+        </p:nvPicPr>
+        <p:blipFill>
+          <a:blip r:embed="rId3"/>
+          <a:stretch>
+            <a:fillRect/>
+          </a:stretch>
+        </p:blipFill>
+        <p:spPr>
+          <a:xfrm>
+            <a:off x="4846320" y="2331720"/>
+            <a:ext cx="3931920" cy="2557763"/>
+          </a:xfrm>
+          <a:prstGeom prst="rect">
+            <a:avLst/>
+          </a:prstGeom>
+        </p:spPr>
+      </p:pic>
     </p:spTree>
     <p:extLst>
       <p:ext uri="{BB962C8B-B14F-4D97-AF65-F5344CB8AC3E}">
@@ -9346,7 +9722,7 @@
         <p:spPr>
           <a:xfrm xmlns:a="http://schemas.openxmlformats.org/drawingml/2006/main">
             <a:off x="762000" y="1571625"/>
-            <a:ext cx="7620000" cy="990600"/>
+            <a:ext cx="3977639" cy="990600"/>
           </a:xfrm>
           <a:prstGeom xmlns:a="http://schemas.openxmlformats.org/drawingml/2006/main" prst="rect">
             <a:avLst/>
@@ -9373,15 +9749,15 @@
               </a:defRPr>
             </a:pPr>
             <a:r>
-              <a:rPr sz="2175" b="0">
-                <a:solidFill>
-                  <a:srgbClr val="111111"/>
-                </a:solidFill>
-                <a:latin typeface="Calibri"/>
-                <a:ea typeface="Calibri"/>
-                <a:cs typeface="Calibri"/>
-              </a:rPr>
-              <a:t>En ideal strömtransformator är märkt 300/5 A. Primärströmmen är 180 A. Endast beräkning på data.</a:t>
+              <a:rPr sz="1700" b="0">
+                <a:solidFill>
+                  <a:srgbClr val="111111"/>
+                </a:solidFill>
+                <a:latin typeface="Calibri"/>
+                <a:ea typeface="Calibri"/>
+                <a:cs typeface="Calibri"/>
+              </a:rPr>
+              <a:t>En ideal strömtransformator är märkt 300/5 A. Primärströmmen är 150 A. Endast beräkning på data.</a:t>
             </a:r>
           </a:p>
         </p:txBody>
@@ -9403,7 +9779,7 @@
         <p:spPr>
           <a:xfrm xmlns:a="http://schemas.openxmlformats.org/drawingml/2006/main">
             <a:off x="762000" y="2705100"/>
-            <a:ext cx="7620000" cy="790575"/>
+            <a:ext cx="3977639" cy="790575"/>
           </a:xfrm>
           <a:prstGeom xmlns:a="http://schemas.openxmlformats.org/drawingml/2006/main" prst="rect">
             <a:avLst/>
@@ -9438,7 +9814,51 @@
                 <a:ea typeface="Calibri"/>
                 <a:cs typeface="Calibri"/>
               </a:rPr>
-              <a:t>kI = I₁,märk/I₂,märk     I₂ = I₁/kI</a:t>
+              <a:t>k</a:t>
+            </a:r>
+            <a:r>
+              <a:rPr sz="2325" b="1" baseline="-25000">
+                <a:solidFill>
+                  <a:srgbClr val="064F91"/>
+                </a:solidFill>
+                <a:latin typeface="Calibri"/>
+                <a:ea typeface="Calibri"/>
+                <a:cs typeface="Calibri"/>
+              </a:rPr>
+              <a:t>I</a:t>
+            </a:r>
+            <a:r>
+              <a:rPr sz="2325" b="1">
+                <a:solidFill>
+                  <a:srgbClr val="064F91"/>
+                </a:solidFill>
+                <a:latin typeface="Calibri"/>
+                <a:ea typeface="Calibri"/>
+                <a:cs typeface="Calibri"/>
+              </a:rPr>
+              <a:t> = I₁,märk/I₂,märk     I₂ = I₁/</a:t>
+            </a:r>
+            <a:r>
+              <a:rPr sz="2325" b="1">
+                <a:solidFill>
+                  <a:srgbClr val="064F91"/>
+                </a:solidFill>
+                <a:latin typeface="Calibri"/>
+                <a:ea typeface="Calibri"/>
+                <a:cs typeface="Calibri"/>
+              </a:rPr>
+              <a:t>k</a:t>
+            </a:r>
+            <a:r>
+              <a:rPr sz="2325" b="1" baseline="-25000">
+                <a:solidFill>
+                  <a:srgbClr val="064F91"/>
+                </a:solidFill>
+                <a:latin typeface="Calibri"/>
+                <a:ea typeface="Calibri"/>
+                <a:cs typeface="Calibri"/>
+              </a:rPr>
+              <a:t>I</a:t>
             </a:r>
           </a:p>
         </p:txBody>
@@ -9460,7 +9880,7 @@
         <p:spPr>
           <a:xfrm xmlns:a="http://schemas.openxmlformats.org/drawingml/2006/main">
             <a:off x="762000" y="3657600"/>
-            <a:ext cx="7620000" cy="1524000"/>
+            <a:ext cx="3977639" cy="1524000"/>
           </a:xfrm>
           <a:prstGeom xmlns:a="http://schemas.openxmlformats.org/drawingml/2006/main" prst="rect">
             <a:avLst/>
@@ -9487,15 +9907,48 @@
               </a:defRPr>
             </a:pPr>
             <a:r>
-              <a:rPr sz="2063" b="0">
-                <a:solidFill>
-                  <a:srgbClr val="111111"/>
-                </a:solidFill>
-                <a:latin typeface="Calibri"/>
-                <a:ea typeface="Calibri"/>
-                <a:cs typeface="Calibri"/>
-              </a:rPr>
-              <a:t>1. kI = 300/5 = 60.</a:t>
+              <a:rPr sz="1950" b="0">
+                <a:solidFill>
+                  <a:srgbClr val="111111"/>
+                </a:solidFill>
+                <a:latin typeface="Calibri"/>
+                <a:ea typeface="Calibri"/>
+                <a:cs typeface="Calibri"/>
+              </a:rPr>
+              <a:t>1. </a:t>
+            </a:r>
+            <a:r>
+              <a:rPr sz="1950" b="0">
+                <a:solidFill>
+                  <a:srgbClr val="111111"/>
+                </a:solidFill>
+                <a:latin typeface="Calibri"/>
+                <a:ea typeface="Calibri"/>
+                <a:cs typeface="Calibri"/>
+              </a:rPr>
+              <a:t>k</a:t>
+            </a:r>
+            <a:r>
+              <a:rPr sz="1950" b="0" baseline="-25000">
+                <a:solidFill>
+                  <a:srgbClr val="111111"/>
+                </a:solidFill>
+                <a:latin typeface="Calibri"/>
+                <a:ea typeface="Calibri"/>
+                <a:cs typeface="Calibri"/>
+              </a:rPr>
+              <a:t>I</a:t>
+            </a:r>
+            <a:r>
+              <a:rPr sz="1950" b="0">
+                <a:solidFill>
+                  <a:srgbClr val="111111"/>
+                </a:solidFill>
+                <a:latin typeface="Calibri"/>
+                <a:ea typeface="Calibri"/>
+                <a:cs typeface="Calibri"/>
+              </a:rPr>
+              <a:t> = 300/5 = 60.</a:t>
             </a:r>
           </a:p>
           <a:p xmlns:a="http://schemas.openxmlformats.org/drawingml/2006/main">
@@ -9510,15 +9963,15 @@
               </a:defRPr>
             </a:pPr>
             <a:r>
-              <a:rPr sz="2063" b="0">
-                <a:solidFill>
-                  <a:srgbClr val="111111"/>
-                </a:solidFill>
-                <a:latin typeface="Calibri"/>
-                <a:ea typeface="Calibri"/>
-                <a:cs typeface="Calibri"/>
-              </a:rPr>
-              <a:t>2. I₂ = 180/60 = 3 A.</a:t>
+              <a:rPr sz="1950" b="0">
+                <a:solidFill>
+                  <a:srgbClr val="111111"/>
+                </a:solidFill>
+                <a:latin typeface="Calibri"/>
+                <a:ea typeface="Calibri"/>
+                <a:cs typeface="Calibri"/>
+              </a:rPr>
+              <a:t>2. I₂ = 150/60 = 2,5 A.</a:t>
             </a:r>
           </a:p>
           <a:p xmlns:a="http://schemas.openxmlformats.org/drawingml/2006/main">
@@ -9533,15 +9986,15 @@
               </a:defRPr>
             </a:pPr>
             <a:r>
-              <a:rPr sz="2063" b="0">
-                <a:solidFill>
-                  <a:srgbClr val="111111"/>
-                </a:solidFill>
-                <a:latin typeface="Calibri"/>
-                <a:ea typeface="Calibri"/>
-                <a:cs typeface="Calibri"/>
-              </a:rPr>
-              <a:t>3. Kontroll: 3/5 = 180/300 = 0,60 av märkström på båda sidor.</a:t>
+              <a:rPr sz="1950" b="0">
+                <a:solidFill>
+                  <a:srgbClr val="111111"/>
+                </a:solidFill>
+                <a:latin typeface="Calibri"/>
+                <a:ea typeface="Calibri"/>
+                <a:cs typeface="Calibri"/>
+              </a:rPr>
+              <a:t>3. Kontroll: 2,5/5 = 150/300 = 0,50 av märkström på båda sidor.</a:t>
             </a:r>
           </a:p>
         </p:txBody>
@@ -9563,7 +10016,7 @@
         <p:spPr>
           <a:xfrm xmlns:a="http://schemas.openxmlformats.org/drawingml/2006/main">
             <a:off x="762000" y="5372100"/>
-            <a:ext cx="7620000" cy="685800"/>
+            <a:ext cx="3977639" cy="685800"/>
           </a:xfrm>
           <a:prstGeom xmlns:a="http://schemas.openxmlformats.org/drawingml/2006/main" prst="rect">
             <a:avLst/>
@@ -9590,7 +10043,7 @@
               </a:defRPr>
             </a:pPr>
             <a:r>
-              <a:rPr sz="1913" b="0">
+              <a:rPr sz="1550" b="0">
                 <a:solidFill>
                   <a:srgbClr val="111111"/>
                 </a:solidFill>
@@ -9660,6 +10113,30 @@
           </a:p>
         </p:txBody>
       </p:sp>
+      <p:pic xmlns:a="http://schemas.openxmlformats.org/drawingml/2006/main" xmlns:r="http://schemas.openxmlformats.org/officeDocument/2006/relationships">
+        <p:nvPicPr>
+          <p:cNvPr id="16" name="Figur: Strömtransformator 300/5 A med primärstr" descr="Strömtransformator 300/5 A med primärström 150 A och sekundärström 2,5 A"/>
+          <p:cNvPicPr>
+            <a:picLocks noChangeAspect="1"/>
+          </p:cNvPicPr>
+          <p:nvPr/>
+        </p:nvPicPr>
+        <p:blipFill>
+          <a:blip r:embed="rId3"/>
+          <a:stretch>
+            <a:fillRect/>
+          </a:stretch>
+        </p:blipFill>
+        <p:spPr>
+          <a:xfrm>
+            <a:off x="4892040" y="1645920"/>
+            <a:ext cx="3886200" cy="2528021"/>
+          </a:xfrm>
+          <a:prstGeom prst="rect">
+            <a:avLst/>
+          </a:prstGeom>
+        </p:spPr>
+      </p:pic>
     </p:spTree>
     <p:extLst>
       <p:ext uri="{BB962C8B-B14F-4D97-AF65-F5344CB8AC3E}">
@@ -14496,64 +14973,6 @@
       </p:sp>
       <p:sp>
         <p:nvSpPr>
-          <p:cNvPr id="8" name="Källor och lärarstöd finns även i bildanteckningarna.">
-            <a:extLst xmlns:a="http://schemas.openxmlformats.org/drawingml/2006/main">
-              <a:ext uri="{FF2B5EF4-FFF2-40B4-BE49-F238E27FC236}">
-                <a16:creationId xmlns:a16="http://schemas.microsoft.com/office/drawing/2014/main" id="{EC205102-FCD3-4560-83A5-6DD17E720259}"/>
-              </a:ext>
-            </a:extLst>
-          </p:cNvPr>
-          <p:cNvSpPr>
-            <a:spLocks xmlns:a="http://schemas.openxmlformats.org/drawingml/2006/main" noGrp="1"/>
-          </p:cNvSpPr>
-          <p:nvPr/>
-        </p:nvSpPr>
-        <p:spPr>
-          <a:xfrm xmlns:a="http://schemas.openxmlformats.org/drawingml/2006/main">
-            <a:off x="762000" y="5676900"/>
-            <a:ext cx="7620000" cy="352425"/>
-          </a:xfrm>
-          <a:prstGeom xmlns:a="http://schemas.openxmlformats.org/drawingml/2006/main" prst="rect">
-            <a:avLst/>
-          </a:prstGeom>
-          <a:noFill xmlns:a="http://schemas.openxmlformats.org/drawingml/2006/main"/>
-          <a:ln xmlns:a="http://schemas.openxmlformats.org/drawingml/2006/main" w="0">
-            <a:noFill/>
-          </a:ln>
-        </p:spPr>
-        <p:txBody>
-          <a:bodyPr xmlns:a="http://schemas.openxmlformats.org/drawingml/2006/main" wrap="square" lIns="0" tIns="0" rIns="0" bIns="0" anchor="t">
-            <a:noAutofit/>
-          </a:bodyPr>
-          <a:lstStyle xmlns:a="http://schemas.openxmlformats.org/drawingml/2006/main"/>
-          <a:p xmlns:a="http://schemas.openxmlformats.org/drawingml/2006/main">
-            <a:pPr algn="l">
-              <a:buNone/>
-              <a:defRPr sz="1800" b="0">
-                <a:solidFill>
-                  <a:srgbClr val="111111"/>
-                </a:solidFill>
-                <a:latin typeface="Calibri"/>
-                <a:ea typeface="Calibri"/>
-                <a:cs typeface="Calibri"/>
-              </a:defRPr>
-            </a:pPr>
-            <a:r>
-              <a:rPr sz="1800" b="0">
-                <a:solidFill>
-                  <a:srgbClr val="111111"/>
-                </a:solidFill>
-                <a:latin typeface="Calibri"/>
-                <a:ea typeface="Calibri"/>
-                <a:cs typeface="Calibri"/>
-              </a:rPr>
-              <a:t>Källor och lärarstöd finns även i bildanteckningarna.</a:t>
-            </a:r>
-          </a:p>
-        </p:txBody>
-      </p:sp>
-      <p:sp>
-        <p:nvSpPr>
           <p:cNvPr id="9" name="22">
             <a:extLst xmlns:a="http://schemas.openxmlformats.org/drawingml/2006/main">
               <a:ext uri="{FF2B5EF4-FFF2-40B4-BE49-F238E27FC236}">
@@ -14772,7 +15191,7 @@
       </p:sp>
       <p:sp>
         <p:nvSpPr>
-          <p:cNvPr id="11" name="Iᴸ är linjeström. Uᴸ är linjespänning i trefasformlerna.">
+          <p:cNvPr id="11" name="IL är linjeström. UL är linjespänning i trefasformlerna.">
             <a:extLst xmlns:a="http://schemas.openxmlformats.org/drawingml/2006/main">
               <a:ext uri="{FF2B5EF4-FFF2-40B4-BE49-F238E27FC236}">
                 <a16:creationId xmlns:a16="http://schemas.microsoft.com/office/drawing/2014/main" id="{1C9B202A-B661-4EC5-964F-6162A8D6ADD3}"/>
@@ -14822,7 +15241,51 @@
                 <a:ea typeface="Calibri"/>
                 <a:cs typeface="Calibri"/>
               </a:rPr>
-              <a:t>Iᴸ är linjeström. Uᴸ är linjespänning i trefasformlerna.</a:t>
+              <a:t>I</a:t>
+            </a:r>
+            <a:r>
+              <a:rPr sz="2250" b="0" baseline="-25000">
+                <a:solidFill>
+                  <a:srgbClr val="111111"/>
+                </a:solidFill>
+                <a:latin typeface="Calibri"/>
+                <a:ea typeface="Calibri"/>
+                <a:cs typeface="Calibri"/>
+              </a:rPr>
+              <a:t>L</a:t>
+            </a:r>
+            <a:r>
+              <a:rPr sz="2250" b="0">
+                <a:solidFill>
+                  <a:srgbClr val="111111"/>
+                </a:solidFill>
+                <a:latin typeface="Calibri"/>
+                <a:ea typeface="Calibri"/>
+                <a:cs typeface="Calibri"/>
+              </a:rPr>
+              <a:t> är linjeström. U</a:t>
+            </a:r>
+            <a:r>
+              <a:rPr sz="2250" b="0" baseline="-25000">
+                <a:solidFill>
+                  <a:srgbClr val="111111"/>
+                </a:solidFill>
+                <a:latin typeface="Calibri"/>
+                <a:ea typeface="Calibri"/>
+                <a:cs typeface="Calibri"/>
+              </a:rPr>
+              <a:t>L</a:t>
+            </a:r>
+            <a:r>
+              <a:rPr sz="2250" b="0">
+                <a:solidFill>
+                  <a:srgbClr val="111111"/>
+                </a:solidFill>
+                <a:latin typeface="Calibri"/>
+                <a:ea typeface="Calibri"/>
+                <a:cs typeface="Calibri"/>
+              </a:rPr>
+              <a:t> är linjespänning i trefasformlerna.</a:t>
             </a:r>
           </a:p>
         </p:txBody>
@@ -15711,7 +16174,7 @@
       </p:sp>
       <p:sp>
         <p:nvSpPr>
-          <p:cNvPr id="4" name="P = √3 UᴸIᴸ PF">
+          <p:cNvPr id="4" name="P = √3 ULIL PF">
             <a:extLst xmlns:a="http://schemas.openxmlformats.org/drawingml/2006/main">
               <a:ext uri="{FF2B5EF4-FFF2-40B4-BE49-F238E27FC236}">
                 <a16:creationId xmlns:a16="http://schemas.microsoft.com/office/drawing/2014/main" id="{282CA511-87E0-4438-ADF8-C01DDBE34074}"/>
@@ -15762,7 +16225,51 @@
                 <a:ea typeface="Calibri"/>
                 <a:cs typeface="Calibri"/>
               </a:rPr>
-              <a:t>P = √3 UᴸIᴸ PF</a:t>
+              <a:t>P = √3 U</a:t>
+            </a:r>
+            <a:r>
+              <a:rPr sz="2925" b="1" baseline="-25000">
+                <a:solidFill>
+                  <a:srgbClr val="064F91"/>
+                </a:solidFill>
+                <a:latin typeface="Calibri"/>
+                <a:ea typeface="Calibri"/>
+                <a:cs typeface="Calibri"/>
+              </a:rPr>
+              <a:t>L</a:t>
+            </a:r>
+            <a:r>
+              <a:rPr sz="2925" b="1">
+                <a:solidFill>
+                  <a:srgbClr val="064F91"/>
+                </a:solidFill>
+                <a:latin typeface="Calibri"/>
+                <a:ea typeface="Calibri"/>
+                <a:cs typeface="Calibri"/>
+              </a:rPr>
+              <a:t>I</a:t>
+            </a:r>
+            <a:r>
+              <a:rPr sz="2925" b="1" baseline="-25000">
+                <a:solidFill>
+                  <a:srgbClr val="064F91"/>
+                </a:solidFill>
+                <a:latin typeface="Calibri"/>
+                <a:ea typeface="Calibri"/>
+                <a:cs typeface="Calibri"/>
+              </a:rPr>
+              <a:t>L</a:t>
+            </a:r>
+            <a:r>
+              <a:rPr sz="2925" b="1">
+                <a:solidFill>
+                  <a:srgbClr val="064F91"/>
+                </a:solidFill>
+                <a:latin typeface="Calibri"/>
+                <a:ea typeface="Calibri"/>
+                <a:cs typeface="Calibri"/>
+              </a:rPr>
+              <a:t> PF</a:t>
             </a:r>
           </a:p>
         </p:txBody>
@@ -16028,7 +16535,7 @@
         <p:spPr>
           <a:xfrm xmlns:a="http://schemas.openxmlformats.org/drawingml/2006/main">
             <a:off x="762000" y="1619250"/>
-            <a:ext cx="7620000" cy="1466850"/>
+            <a:ext cx="3977639" cy="1466850"/>
           </a:xfrm>
           <a:prstGeom xmlns:a="http://schemas.openxmlformats.org/drawingml/2006/main" prst="rect">
             <a:avLst/>
@@ -16056,7 +16563,7 @@
               </a:defRPr>
             </a:pPr>
             <a:r>
-              <a:rPr sz="2400" b="0">
+              <a:rPr sz="2200" b="0">
                 <a:solidFill>
                   <a:srgbClr val="111111"/>
                 </a:solidFill>
@@ -16080,7 +16587,7 @@
               </a:defRPr>
             </a:pPr>
             <a:r>
-              <a:rPr sz="2400" b="0">
+              <a:rPr sz="2200" b="0">
                 <a:solidFill>
                   <a:srgbClr val="111111"/>
                 </a:solidFill>
@@ -16110,7 +16617,7 @@
         <p:spPr>
           <a:xfrm xmlns:a="http://schemas.openxmlformats.org/drawingml/2006/main">
             <a:off x="762000" y="3200400"/>
-            <a:ext cx="7620000" cy="838200"/>
+            <a:ext cx="3977639" cy="838200"/>
           </a:xfrm>
           <a:prstGeom xmlns:a="http://schemas.openxmlformats.org/drawingml/2006/main" prst="rect">
             <a:avLst/>
@@ -16138,7 +16645,7 @@
               </a:defRPr>
             </a:pPr>
             <a:r>
-              <a:rPr sz="2925" b="1">
+              <a:rPr sz="2150" b="1">
                 <a:solidFill>
                   <a:srgbClr val="064F91"/>
                 </a:solidFill>
@@ -16168,7 +16675,7 @@
         <p:spPr>
           <a:xfrm xmlns:a="http://schemas.openxmlformats.org/drawingml/2006/main">
             <a:off x="762000" y="4429125"/>
-            <a:ext cx="7620000" cy="1352550"/>
+            <a:ext cx="3977639" cy="1352550"/>
           </a:xfrm>
           <a:prstGeom xmlns:a="http://schemas.openxmlformats.org/drawingml/2006/main" prst="rect">
             <a:avLst/>
@@ -16196,7 +16703,7 @@
               </a:defRPr>
             </a:pPr>
             <a:r>
-              <a:rPr sz="2250" b="0">
+              <a:rPr sz="2050" b="0">
                 <a:solidFill>
                   <a:srgbClr val="111111"/>
                 </a:solidFill>
@@ -16220,7 +16727,7 @@
               </a:defRPr>
             </a:pPr>
             <a:r>
-              <a:rPr sz="2250" b="0">
+              <a:rPr sz="2050" b="0">
                 <a:solidFill>
                   <a:srgbClr val="111111"/>
                 </a:solidFill>
@@ -16291,6 +16798,30 @@
           </a:p>
         </p:txBody>
       </p:sp>
+      <p:pic xmlns:a="http://schemas.openxmlformats.org/drawingml/2006/main" xmlns:r="http://schemas.openxmlformats.org/officeDocument/2006/relationships">
+        <p:nvPicPr>
+          <p:cNvPr id="9" name="Figur: Ställverksfack: samlingsskena, frånskilj" descr="Ställverksfack: samlingsskena, frånskiljare, brytare, strömtransformator och jordningskopplare mot kabel till förbrukare, med förregling"/>
+          <p:cNvPicPr>
+            <a:picLocks noChangeAspect="1"/>
+          </p:cNvPicPr>
+          <p:nvPr/>
+        </p:nvPicPr>
+        <p:blipFill>
+          <a:blip r:embed="rId3"/>
+          <a:stretch>
+            <a:fillRect/>
+          </a:stretch>
+        </p:blipFill>
+        <p:spPr>
+          <a:xfrm>
+            <a:off x="4892040" y="1645920"/>
+            <a:ext cx="3886200" cy="3886200"/>
+          </a:xfrm>
+          <a:prstGeom prst="rect">
+            <a:avLst/>
+          </a:prstGeom>
+        </p:spPr>
+      </p:pic>
     </p:spTree>
     <p:extLst>
       <p:ext uri="{BB962C8B-B14F-4D97-AF65-F5344CB8AC3E}">
@@ -16412,7 +16943,7 @@
         <p:spPr>
           <a:xfrm xmlns:a="http://schemas.openxmlformats.org/drawingml/2006/main">
             <a:off x="762000" y="1619250"/>
-            <a:ext cx="7620000" cy="1466850"/>
+            <a:ext cx="3977639" cy="1466850"/>
           </a:xfrm>
           <a:prstGeom xmlns:a="http://schemas.openxmlformats.org/drawingml/2006/main" prst="rect">
             <a:avLst/>
@@ -16440,7 +16971,7 @@
               </a:defRPr>
             </a:pPr>
             <a:r>
-              <a:rPr sz="2400" b="0">
+              <a:rPr sz="1800" b="0">
                 <a:solidFill>
                   <a:srgbClr val="111111"/>
                 </a:solidFill>
@@ -16464,7 +16995,7 @@
               </a:defRPr>
             </a:pPr>
             <a:r>
-              <a:rPr sz="2400" b="0">
+              <a:rPr sz="1800" b="0">
                 <a:solidFill>
                   <a:srgbClr val="111111"/>
                 </a:solidFill>
@@ -16494,7 +17025,7 @@
         <p:spPr>
           <a:xfrm xmlns:a="http://schemas.openxmlformats.org/drawingml/2006/main">
             <a:off x="762000" y="3200400"/>
-            <a:ext cx="7620000" cy="838200"/>
+            <a:ext cx="3977639" cy="838200"/>
           </a:xfrm>
           <a:prstGeom xmlns:a="http://schemas.openxmlformats.org/drawingml/2006/main" prst="rect">
             <a:avLst/>
@@ -16522,7 +17053,7 @@
               </a:defRPr>
             </a:pPr>
             <a:r>
-              <a:rPr sz="2925" b="1">
+              <a:rPr sz="2550" b="1">
                 <a:solidFill>
                   <a:srgbClr val="064F91"/>
                 </a:solidFill>
@@ -16552,7 +17083,7 @@
         <p:spPr>
           <a:xfrm xmlns:a="http://schemas.openxmlformats.org/drawingml/2006/main">
             <a:off x="762000" y="4429125"/>
-            <a:ext cx="7620000" cy="1352550"/>
+            <a:ext cx="3977639" cy="1352550"/>
           </a:xfrm>
           <a:prstGeom xmlns:a="http://schemas.openxmlformats.org/drawingml/2006/main" prst="rect">
             <a:avLst/>
@@ -16580,7 +17111,7 @@
               </a:defRPr>
             </a:pPr>
             <a:r>
-              <a:rPr sz="2250" b="0">
+              <a:rPr sz="1900" b="0">
                 <a:solidFill>
                   <a:srgbClr val="111111"/>
                 </a:solidFill>
@@ -16604,7 +17135,7 @@
               </a:defRPr>
             </a:pPr>
             <a:r>
-              <a:rPr sz="2250" b="0">
+              <a:rPr sz="1900" b="0">
                 <a:solidFill>
                   <a:srgbClr val="111111"/>
                 </a:solidFill>
@@ -16675,6 +17206,30 @@
           </a:p>
         </p:txBody>
       </p:sp>
+      <p:pic xmlns:a="http://schemas.openxmlformats.org/drawingml/2006/main" xmlns:r="http://schemas.openxmlformats.org/officeDocument/2006/relationships">
+        <p:nvPicPr>
+          <p:cNvPr id="9" name="Figur: Strömtransformatorn mäter, skyddsreläet " descr="Strömtransformatorn mäter, skyddsreläet beslutar och brytaren kopplar bort"/>
+          <p:cNvPicPr>
+            <a:picLocks noChangeAspect="1"/>
+          </p:cNvPicPr>
+          <p:nvPr/>
+        </p:nvPicPr>
+        <p:blipFill>
+          <a:blip r:embed="rId3"/>
+          <a:stretch>
+            <a:fillRect/>
+          </a:stretch>
+        </p:blipFill>
+        <p:spPr>
+          <a:xfrm>
+            <a:off x="4892040" y="1645920"/>
+            <a:ext cx="3886200" cy="2709112"/>
+          </a:xfrm>
+          <a:prstGeom prst="rect">
+            <a:avLst/>
+          </a:prstGeom>
+        </p:spPr>
+      </p:pic>
     </p:spTree>
     <p:extLst>
       <p:ext uri="{BB962C8B-B14F-4D97-AF65-F5344CB8AC3E}">
@@ -16795,7 +17350,7 @@
         <p:spPr>
           <a:xfrm xmlns:a="http://schemas.openxmlformats.org/drawingml/2006/main">
             <a:off x="762000" y="1571625"/>
-            <a:ext cx="7620000" cy="990600"/>
+            <a:ext cx="3977639" cy="990600"/>
           </a:xfrm>
           <a:prstGeom xmlns:a="http://schemas.openxmlformats.org/drawingml/2006/main" prst="rect">
             <a:avLst/>
@@ -16822,22 +17377,22 @@
               </a:defRPr>
             </a:pPr>
             <a:r>
-              <a:rPr sz="2175" b="0">
-                <a:solidFill>
-                  <a:srgbClr val="111111"/>
-                </a:solidFill>
-                <a:latin typeface="Calibri"/>
-                <a:ea typeface="Calibri"/>
-                <a:cs typeface="Calibri"/>
-              </a:rPr>
-              <a:t>Symmetrisk trefaslast med P = 500 kW och PF = 0,80. Jämför 5 kV och 500 V linjespänning.</a:t>
-            </a:r>
-          </a:p>
-        </p:txBody>
-      </p:sp>
-      <p:sp>
-        <p:nvSpPr>
-          <p:cNvPr id="11" name="Iᴸ = P/(√3 UᴸPF)">
+              <a:rPr sz="1900" b="0">
+                <a:solidFill>
+                  <a:srgbClr val="111111"/>
+                </a:solidFill>
+                <a:latin typeface="Calibri"/>
+                <a:ea typeface="Calibri"/>
+                <a:cs typeface="Calibri"/>
+              </a:rPr>
+              <a:t>Symmetrisk trefaslast med P = 500 kW och PF = 0,80. Jämför 5 kV och 500 V linjespänning.</a:t>
+            </a:r>
+          </a:p>
+        </p:txBody>
+      </p:sp>
+      <p:sp>
+        <p:nvSpPr>
+          <p:cNvPr id="11" name="IL = P/(√3 ULPF)">
             <a:extLst xmlns:a="http://schemas.openxmlformats.org/drawingml/2006/main">
               <a:ext uri="{FF2B5EF4-FFF2-40B4-BE49-F238E27FC236}">
                 <a16:creationId xmlns:a16="http://schemas.microsoft.com/office/drawing/2014/main" id="{E896EDEC-BE6E-4802-B12E-775886C2A3A2}"/>
@@ -16852,7 +17407,7 @@
         <p:spPr>
           <a:xfrm xmlns:a="http://schemas.openxmlformats.org/drawingml/2006/main">
             <a:off x="762000" y="2705100"/>
-            <a:ext cx="7620000" cy="790575"/>
+            <a:ext cx="3977639" cy="790575"/>
           </a:xfrm>
           <a:prstGeom xmlns:a="http://schemas.openxmlformats.org/drawingml/2006/main" prst="rect">
             <a:avLst/>
@@ -16887,14 +17442,58 @@
                 <a:ea typeface="Calibri"/>
                 <a:cs typeface="Calibri"/>
               </a:rPr>
-              <a:t>Iᴸ = P/(√3 UᴸPF)</a:t>
-            </a:r>
-          </a:p>
-        </p:txBody>
-      </p:sp>
-      <p:sp>
-        <p:nvSpPr>
-          <p:cNvPr id="12" name="1. Vid 5 kV: Iᴸ = 500 000/(√3 · 5 000 · 0,80) ≈ 72,2 A.&#10;2. Vid 50">
+              <a:t>I</a:t>
+            </a:r>
+            <a:r>
+              <a:rPr sz="2325" b="1" baseline="-25000">
+                <a:solidFill>
+                  <a:srgbClr val="064F91"/>
+                </a:solidFill>
+                <a:latin typeface="Calibri"/>
+                <a:ea typeface="Calibri"/>
+                <a:cs typeface="Calibri"/>
+              </a:rPr>
+              <a:t>L</a:t>
+            </a:r>
+            <a:r>
+              <a:rPr sz="2325" b="1">
+                <a:solidFill>
+                  <a:srgbClr val="064F91"/>
+                </a:solidFill>
+                <a:latin typeface="Calibri"/>
+                <a:ea typeface="Calibri"/>
+                <a:cs typeface="Calibri"/>
+              </a:rPr>
+              <a:t> = P/(√3 U</a:t>
+            </a:r>
+            <a:r>
+              <a:rPr sz="2325" b="1" baseline="-25000">
+                <a:solidFill>
+                  <a:srgbClr val="064F91"/>
+                </a:solidFill>
+                <a:latin typeface="Calibri"/>
+                <a:ea typeface="Calibri"/>
+                <a:cs typeface="Calibri"/>
+              </a:rPr>
+              <a:t>L</a:t>
+            </a:r>
+            <a:r>
+              <a:rPr sz="2325" b="1">
+                <a:solidFill>
+                  <a:srgbClr val="064F91"/>
+                </a:solidFill>
+                <a:latin typeface="Calibri"/>
+                <a:ea typeface="Calibri"/>
+                <a:cs typeface="Calibri"/>
+              </a:rPr>
+              <a:t>PF)</a:t>
+            </a:r>
+          </a:p>
+        </p:txBody>
+      </p:sp>
+      <p:sp>
+        <p:nvSpPr>
+          <p:cNvPr id="12" name="1. Vid 5 kV: IL = 500 000/(√3 · 5 000 · 0,80) ≈ 72,2 A.&#10;2. Vid 50">
             <a:extLst xmlns:a="http://schemas.openxmlformats.org/drawingml/2006/main">
               <a:ext uri="{FF2B5EF4-FFF2-40B4-BE49-F238E27FC236}">
                 <a16:creationId xmlns:a16="http://schemas.microsoft.com/office/drawing/2014/main" id="{6EADC718-FCD1-44B7-94BF-C9BB0CBD0752}"/>
@@ -16909,7 +17508,7 @@
         <p:spPr>
           <a:xfrm xmlns:a="http://schemas.openxmlformats.org/drawingml/2006/main">
             <a:off x="762000" y="3657600"/>
-            <a:ext cx="7620000" cy="1524000"/>
+            <a:ext cx="3977639" cy="1524000"/>
           </a:xfrm>
           <a:prstGeom xmlns:a="http://schemas.openxmlformats.org/drawingml/2006/main" prst="rect">
             <a:avLst/>
@@ -16936,15 +17535,37 @@
               </a:defRPr>
             </a:pPr>
             <a:r>
-              <a:rPr sz="2063" b="0">
-                <a:solidFill>
-                  <a:srgbClr val="111111"/>
-                </a:solidFill>
-                <a:latin typeface="Calibri"/>
-                <a:ea typeface="Calibri"/>
-                <a:cs typeface="Calibri"/>
-              </a:rPr>
-              <a:t>1. Vid 5 kV: Iᴸ = 500 000/(√3 · 5 000 · 0,80) ≈ 72,2 A.</a:t>
+              <a:rPr sz="1950" b="0">
+                <a:solidFill>
+                  <a:srgbClr val="111111"/>
+                </a:solidFill>
+                <a:latin typeface="Calibri"/>
+                <a:ea typeface="Calibri"/>
+                <a:cs typeface="Calibri"/>
+              </a:rPr>
+              <a:t>1. Vid 5 kV: I</a:t>
+            </a:r>
+            <a:r>
+              <a:rPr sz="1950" b="0" baseline="-25000">
+                <a:solidFill>
+                  <a:srgbClr val="111111"/>
+                </a:solidFill>
+                <a:latin typeface="Calibri"/>
+                <a:ea typeface="Calibri"/>
+                <a:cs typeface="Calibri"/>
+              </a:rPr>
+              <a:t>L</a:t>
+            </a:r>
+            <a:r>
+              <a:rPr sz="1950" b="0">
+                <a:solidFill>
+                  <a:srgbClr val="111111"/>
+                </a:solidFill>
+                <a:latin typeface="Calibri"/>
+                <a:ea typeface="Calibri"/>
+                <a:cs typeface="Calibri"/>
+              </a:rPr>
+              <a:t> = 500 000/(√3 · 5 000 · 0,80) ≈ 72,2 A.</a:t>
             </a:r>
           </a:p>
           <a:p xmlns:a="http://schemas.openxmlformats.org/drawingml/2006/main">
@@ -16959,15 +17580,37 @@
               </a:defRPr>
             </a:pPr>
             <a:r>
-              <a:rPr sz="2063" b="0">
-                <a:solidFill>
-                  <a:srgbClr val="111111"/>
-                </a:solidFill>
-                <a:latin typeface="Calibri"/>
-                <a:ea typeface="Calibri"/>
-                <a:cs typeface="Calibri"/>
-              </a:rPr>
-              <a:t>2. Vid 500 V: Iᴸ ≈ 721,7 A.</a:t>
+              <a:rPr sz="1950" b="0">
+                <a:solidFill>
+                  <a:srgbClr val="111111"/>
+                </a:solidFill>
+                <a:latin typeface="Calibri"/>
+                <a:ea typeface="Calibri"/>
+                <a:cs typeface="Calibri"/>
+              </a:rPr>
+              <a:t>2. Vid 500 V: I</a:t>
+            </a:r>
+            <a:r>
+              <a:rPr sz="1950" b="0" baseline="-25000">
+                <a:solidFill>
+                  <a:srgbClr val="111111"/>
+                </a:solidFill>
+                <a:latin typeface="Calibri"/>
+                <a:ea typeface="Calibri"/>
+                <a:cs typeface="Calibri"/>
+              </a:rPr>
+              <a:t>L</a:t>
+            </a:r>
+            <a:r>
+              <a:rPr sz="1950" b="0">
+                <a:solidFill>
+                  <a:srgbClr val="111111"/>
+                </a:solidFill>
+                <a:latin typeface="Calibri"/>
+                <a:ea typeface="Calibri"/>
+                <a:cs typeface="Calibri"/>
+              </a:rPr>
+              <a:t> ≈ 721,7 A.</a:t>
             </a:r>
           </a:p>
           <a:p xmlns:a="http://schemas.openxmlformats.org/drawingml/2006/main">
@@ -16982,15 +17625,15 @@
               </a:defRPr>
             </a:pPr>
             <a:r>
-              <a:rPr sz="2063" b="0">
-                <a:solidFill>
-                  <a:srgbClr val="111111"/>
-                </a:solidFill>
-                <a:latin typeface="Calibri"/>
-                <a:ea typeface="Calibri"/>
-                <a:cs typeface="Calibri"/>
-              </a:rPr>
-              <a:t>3. Spänningskvoten 5 000/500 = 10 ger omvänd strömkvot.</a:t>
+              <a:rPr sz="1950" b="0">
+                <a:solidFill>
+                  <a:srgbClr val="111111"/>
+                </a:solidFill>
+                <a:latin typeface="Calibri"/>
+                <a:ea typeface="Calibri"/>
+                <a:cs typeface="Calibri"/>
+              </a:rPr>
+              <a:t>3. Spänningskvoten 5 000/500 = 10 ger omvänd strömkvot.</a:t>
             </a:r>
           </a:p>
         </p:txBody>
@@ -17012,7 +17655,7 @@
         <p:spPr>
           <a:xfrm xmlns:a="http://schemas.openxmlformats.org/drawingml/2006/main">
             <a:off x="762000" y="5372100"/>
-            <a:ext cx="7620000" cy="685800"/>
+            <a:ext cx="3977639" cy="685800"/>
           </a:xfrm>
           <a:prstGeom xmlns:a="http://schemas.openxmlformats.org/drawingml/2006/main" prst="rect">
             <a:avLst/>
@@ -17039,7 +17682,7 @@
               </a:defRPr>
             </a:pPr>
             <a:r>
-              <a:rPr sz="1913" b="0">
+              <a:rPr sz="1550" b="0">
                 <a:solidFill>
                   <a:srgbClr val="111111"/>
                 </a:solidFill>
@@ -17109,6 +17752,30 @@
           </a:p>
         </p:txBody>
       </p:sp>
+      <p:pic xmlns:a="http://schemas.openxmlformats.org/drawingml/2006/main" xmlns:r="http://schemas.openxmlformats.org/officeDocument/2006/relationships">
+        <p:nvPicPr>
+          <p:cNvPr id="16" name="Figur: Stapeldiagram: linjeström 72,2 A vid 5 k" descr="Stapeldiagram: linjeström 72,2 A vid 5 kV och 721,7 A vid 500 V för 500 kW och PF 0,80"/>
+          <p:cNvPicPr>
+            <a:picLocks noChangeAspect="1"/>
+          </p:cNvPicPr>
+          <p:nvPr/>
+        </p:nvPicPr>
+        <p:blipFill>
+          <a:blip r:embed="rId3"/>
+          <a:stretch>
+            <a:fillRect/>
+          </a:stretch>
+        </p:blipFill>
+        <p:spPr>
+          <a:xfrm>
+            <a:off x="4892040" y="1645920"/>
+            <a:ext cx="3886200" cy="2709112"/>
+          </a:xfrm>
+          <a:prstGeom prst="rect">
+            <a:avLst/>
+          </a:prstGeom>
+        </p:spPr>
+      </p:pic>
     </p:spTree>
     <p:extLst>
       <p:ext uri="{BB962C8B-B14F-4D97-AF65-F5344CB8AC3E}">

--- a/sjoskolan/vecka-44/aktuell/v44_02_Hogspanningssystem_elev.pptx
+++ b/sjoskolan/vecka-44/aktuell/v44_02_Hogspanningssystem_elev.pptx
@@ -3512,6 +3512,10 @@
             <a:noFill/>
           </a:ln>
         </p:spPr>
+        <p:txBody xmlns:a="http://schemas.openxmlformats.org/drawingml/2006/main">
+          <a:bodyPr/>
+          <a:p/>
+        </p:txBody>
       </p:sp>
       <p:sp>
         <p:nvSpPr>
@@ -5466,7 +5470,7 @@
                 <a:ea typeface="Calibri"/>
                 <a:cs typeface="Calibri"/>
               </a:rPr>
-              <a:t>PF)</a:t>
+              <a:t> · PF)</a:t>
             </a:r>
           </a:p>
           <a:p xmlns:a="http://schemas.openxmlformats.org/drawingml/2006/main">
@@ -7585,7 +7589,7 @@
                 <a:ea typeface="Calibri"/>
                 <a:cs typeface="Calibri"/>
               </a:rPr>
-              <a:t>Ordna dessa funktioner i en signalväg: brytare, mättransformator, skyddsrelä.</a:t>
+              <a:t>Ordna dessa funktioner i en signalväg: brytare, mättransformator, skyddsrelä. Vad händer om skyddsreläet saknar hjälpspänning?</a:t>
             </a:r>
           </a:p>
         </p:txBody>
@@ -17486,7 +17490,7 @@
                 <a:ea typeface="Calibri"/>
                 <a:cs typeface="Calibri"/>
               </a:rPr>
-              <a:t>PF)</a:t>
+              <a:t> · PF)</a:t>
             </a:r>
           </a:p>
         </p:txBody>

--- a/sjoskolan/vecka-44/aktuell/v44_02_Hogspanningssystem_elev.pptx
+++ b/sjoskolan/vecka-44/aktuell/v44_02_Hogspanningssystem_elev.pptx
@@ -39,6 +39,7 @@
     <p:sldId id="287" r:id="R352c198b82a64339"/>
     <p:sldId id="288" r:id="Rbaf6f03e32884a6d"/>
     <p:sldId id="289" r:id="Rdc88ad4fdf774abc"/>
+    <p:sldId id="292" r:id="rId42"/>
     <p:sldId id="290" r:id="Red68136c4f0b430d"/>
     <p:sldId id="291" r:id="R11d41177408f4e34"/>
   </p:sldIdLst>
@@ -14286,6 +14287,410 @@
 </file>
 
 <file path=ppt/slides/slide35.xml><?xml version="1.0" encoding="utf-8"?>
+<p:sld xmlns:a="http://schemas.openxmlformats.org/drawingml/2006/main" xmlns:p="http://schemas.openxmlformats.org/presentationml/2006/main" xmlns:r="http://schemas.openxmlformats.org/officeDocument/2006/relationships">
+  <p:cSld>
+    <p:spTree>
+      <p:nvGrpSpPr>
+        <p:cNvPr id="1" name=""/>
+        <p:cNvGrpSpPr/>
+        <p:nvPr/>
+      </p:nvGrpSpPr>
+      <p:grpSpPr/>
+      <p:pic>
+        <p:nvPicPr>
+          <p:cNvPr id="8" name="Bildobjekt 2"/>
+          <p:cNvPicPr>
+            <a:picLocks noChangeAspect="1"/>
+          </p:cNvPicPr>
+          <p:nvPr/>
+        </p:nvPicPr>
+        <p:blipFill>
+          <a:blip r:embed="rId2"/>
+          <a:stretch>
+            <a:fillRect l="0" t="0" r="0" b="0"/>
+          </a:stretch>
+        </p:blipFill>
+        <p:spPr>
+          <a:xfrm>
+            <a:off x="0" y="6098791"/>
+            <a:ext cx="9144006" cy="763524"/>
+          </a:xfrm>
+          <a:prstGeom prst="rect">
+            <a:avLst/>
+          </a:prstGeom>
+        </p:spPr>
+      </p:pic>
+      <p:sp>
+        <p:nvSpPr>
+          <p:cNvPr id="2" name="Skyddsfunktioner">
+            <a:extLst>
+              <a:ext uri="{FF2B5EF4-FFF2-40B4-BE49-F238E27FC236}">
+                <a16:creationId xmlns:a16="http://schemas.microsoft.com/office/drawing/2014/main" id="{DDD44D3F-939C-4559-8A4F-60AFB4359972}"/>
+              </a:ext>
+            </a:extLst>
+          </p:cNvPr>
+          <p:cNvSpPr>
+            <a:spLocks noGrp="1"/>
+          </p:cNvSpPr>
+          <p:nvPr/>
+        </p:nvSpPr>
+        <p:spPr>
+          <a:xfrm>
+            <a:off x="428625" y="495300"/>
+            <a:ext cx="8286750" cy="1028700"/>
+          </a:xfrm>
+          <a:prstGeom prst="rect">
+            <a:avLst/>
+          </a:prstGeom>
+          <a:noFill/>
+          <a:ln w="0">
+            <a:noFill/>
+          </a:ln>
+        </p:spPr>
+        <p:txBody>
+          <a:bodyPr wrap="square" lIns="0" tIns="0" rIns="0" bIns="0" anchor="t">
+            <a:noAutofit/>
+          </a:bodyPr>
+          <a:lstStyle/>
+          <a:p>
+            <a:pPr algn="ctr">
+              <a:buNone/>
+              <a:defRPr sz="3600" b="1">
+                <a:solidFill>
+                  <a:srgbClr val="111111"/>
+                </a:solidFill>
+                <a:latin typeface="Calibri"/>
+                <a:ea typeface="Calibri"/>
+                <a:cs typeface="Calibri"/>
+              </a:defRPr>
+            </a:pPr>
+            <a:r>
+              <a:rPr sz="3600" b="1">
+                <a:solidFill>
+                  <a:srgbClr val="111111"/>
+                </a:solidFill>
+                <a:latin typeface="Calibri"/>
+                <a:ea typeface="Calibri"/>
+                <a:cs typeface="Calibri"/>
+              </a:rPr>
+              <a:t>Neutralpunktsjordning i HV-nät</a:t>
+            </a:r>
+          </a:p>
+        </p:txBody>
+      </p:sp>
+      <p:sp>
+        <p:nvSpPr>
+          <p:cNvPr id="3" name="Överström, jordfel och differentialskydd reagerar på olika felbil">
+            <a:extLst>
+              <a:ext uri="{FF2B5EF4-FFF2-40B4-BE49-F238E27FC236}">
+                <a16:creationId xmlns:a16="http://schemas.microsoft.com/office/drawing/2014/main" id="{F6482E6D-3DB4-4C7C-BF7F-7F904968C6CF}"/>
+              </a:ext>
+            </a:extLst>
+          </p:cNvPr>
+          <p:cNvSpPr>
+            <a:spLocks noGrp="1"/>
+          </p:cNvSpPr>
+          <p:nvPr/>
+        </p:nvSpPr>
+        <p:spPr>
+          <a:xfrm>
+            <a:off x="762000" y="1619250"/>
+            <a:ext cx="3977639" cy="1466850"/>
+          </a:xfrm>
+          <a:prstGeom prst="rect">
+            <a:avLst/>
+          </a:prstGeom>
+          <a:noFill/>
+          <a:ln w="0">
+            <a:noFill/>
+          </a:ln>
+        </p:spPr>
+        <p:txBody>
+          <a:bodyPr wrap="square" lIns="0" tIns="0" rIns="0" bIns="0" anchor="t">
+            <a:noAutofit/>
+          </a:bodyPr>
+          <a:lstStyle/>
+          <a:p>
+            <a:pPr algn="l">
+              <a:buNone/>
+              <a:defRPr sz="2400" b="0">
+                <a:solidFill>
+                  <a:srgbClr val="111111"/>
+                </a:solidFill>
+                <a:latin typeface="Calibri"/>
+                <a:ea typeface="Calibri"/>
+                <a:cs typeface="Calibri"/>
+              </a:defRPr>
+            </a:pPr>
+            <a:r>
+              <a:rPr sz="1800" b="0">
+                <a:solidFill>
+                  <a:srgbClr val="111111"/>
+                </a:solidFill>
+                <a:latin typeface="Calibri"/>
+                <a:ea typeface="Calibri"/>
+                <a:cs typeface="Calibri"/>
+              </a:rPr>
+              <a:t>Fartygens 6,6 och 11 kV-nät har ofta neutralpunkten jordad via ett motstånd (NER).</a:t>
+            </a:r>
+          </a:p>
+          <a:p>
+            <a:pPr algn="l">
+              <a:buNone/>
+              <a:defRPr sz="2400" b="0">
+                <a:solidFill>
+                  <a:srgbClr val="111111"/>
+                </a:solidFill>
+                <a:latin typeface="Calibri"/>
+                <a:ea typeface="Calibri"/>
+                <a:cs typeface="Calibri"/>
+              </a:defRPr>
+            </a:pPr>
+            <a:r>
+              <a:rPr sz="1800" b="0">
+                <a:solidFill>
+                  <a:srgbClr val="111111"/>
+                </a:solidFill>
+                <a:latin typeface="Calibri"/>
+                <a:ea typeface="Calibri"/>
+                <a:cs typeface="Calibri"/>
+              </a:rPr>
+              <a:t>Motståndet begränsar jordfelsströmmen till en bestämd nivå.</a:t>
+            </a:r>
+          </a:p>
+        </p:txBody>
+      </p:sp>
+      <p:sp>
+        <p:nvSpPr>
+          <p:cNvPr id="4" name="Inställning och verifiering hör till anläggningens skyddsplan">
+            <a:extLst>
+              <a:ext uri="{FF2B5EF4-FFF2-40B4-BE49-F238E27FC236}">
+                <a16:creationId xmlns:a16="http://schemas.microsoft.com/office/drawing/2014/main" id="{64426C46-8892-4EF9-8038-C6F74F6A8F59}"/>
+              </a:ext>
+            </a:extLst>
+          </p:cNvPr>
+          <p:cNvSpPr>
+            <a:spLocks noGrp="1"/>
+          </p:cNvSpPr>
+          <p:nvPr/>
+        </p:nvSpPr>
+        <p:spPr>
+          <a:xfrm>
+            <a:off x="762000" y="3200400"/>
+            <a:ext cx="3977639" cy="838200"/>
+          </a:xfrm>
+          <a:prstGeom prst="rect">
+            <a:avLst/>
+          </a:prstGeom>
+          <a:noFill/>
+          <a:ln w="0">
+            <a:noFill/>
+          </a:ln>
+        </p:spPr>
+        <p:txBody>
+          <a:bodyPr wrap="square" lIns="0" tIns="0" rIns="0" bIns="0" anchor="t">
+            <a:noAutofit/>
+          </a:bodyPr>
+          <a:lstStyle/>
+          <a:p>
+            <a:pPr algn="l">
+              <a:buNone/>
+              <a:defRPr sz="2925" b="1">
+                <a:solidFill>
+                  <a:srgbClr val="064F91"/>
+                </a:solidFill>
+                <a:latin typeface="Calibri"/>
+                <a:ea typeface="Calibri"/>
+                <a:cs typeface="Calibri"/>
+              </a:defRPr>
+            </a:pPr>
+            <a:r>
+              <a:rPr sz="2650" b="1">
+                <a:solidFill>
+                  <a:srgbClr val="064F91"/>
+                </a:solidFill>
+                <a:latin typeface="Calibri"/>
+                <a:ea typeface="Calibri"/>
+                <a:cs typeface="Calibri"/>
+              </a:rPr>
+              <a:t>Jordfelsskyddet larmar eller löser ut</a:t>
+            </a:r>
+          </a:p>
+        </p:txBody>
+      </p:sp>
+      <p:sp>
+        <p:nvSpPr>
+          <p:cNvPr id="5" name="Ett skydd som inte löser och ett som löser felaktigt&#10;kan båda hot">
+            <a:extLst>
+              <a:ext uri="{FF2B5EF4-FFF2-40B4-BE49-F238E27FC236}">
+                <a16:creationId xmlns:a16="http://schemas.microsoft.com/office/drawing/2014/main" id="{4BF48DA0-8C14-4086-A69C-D835C0A93FB7}"/>
+              </a:ext>
+            </a:extLst>
+          </p:cNvPr>
+          <p:cNvSpPr>
+            <a:spLocks noGrp="1"/>
+          </p:cNvSpPr>
+          <p:nvPr/>
+        </p:nvSpPr>
+        <p:spPr>
+          <a:xfrm>
+            <a:off x="762000" y="4429125"/>
+            <a:ext cx="3977639" cy="1352550"/>
+          </a:xfrm>
+          <a:prstGeom prst="rect">
+            <a:avLst/>
+          </a:prstGeom>
+          <a:noFill/>
+          <a:ln w="0">
+            <a:noFill/>
+          </a:ln>
+        </p:spPr>
+        <p:txBody>
+          <a:bodyPr wrap="square" lIns="0" tIns="0" rIns="0" bIns="0" anchor="t">
+            <a:noAutofit/>
+          </a:bodyPr>
+          <a:lstStyle/>
+          <a:p>
+            <a:pPr algn="l">
+              <a:buNone/>
+              <a:defRPr sz="2250" b="0">
+                <a:solidFill>
+                  <a:srgbClr val="111111"/>
+                </a:solidFill>
+                <a:latin typeface="Calibri"/>
+                <a:ea typeface="Calibri"/>
+                <a:cs typeface="Calibri"/>
+              </a:defRPr>
+            </a:pPr>
+            <a:r>
+              <a:rPr sz="1650" b="0">
+                <a:solidFill>
+                  <a:srgbClr val="111111"/>
+                </a:solidFill>
+                <a:latin typeface="Calibri"/>
+                <a:ea typeface="Calibri"/>
+                <a:cs typeface="Calibri"/>
+              </a:rPr>
+              <a:t>Jordfelsreläet larmar eller löser ut enligt skyddsplanen.</a:t>
+            </a:r>
+          </a:p>
+          <a:p>
+            <a:pPr algn="l">
+              <a:buNone/>
+              <a:defRPr sz="2250" b="0">
+                <a:solidFill>
+                  <a:srgbClr val="111111"/>
+                </a:solidFill>
+                <a:latin typeface="Calibri"/>
+                <a:ea typeface="Calibri"/>
+                <a:cs typeface="Calibri"/>
+              </a:defRPr>
+            </a:pPr>
+            <a:r>
+              <a:rPr sz="1650" b="0">
+                <a:solidFill>
+                  <a:srgbClr val="111111"/>
+                </a:solidFill>
+                <a:latin typeface="Calibri"/>
+                <a:ea typeface="Calibri"/>
+                <a:cs typeface="Calibri"/>
+              </a:rPr>
+              <a:t>Hur många generatorer som har jordad neutralpunkt samtidigt styrs så att felströmmen blir den avsedda.</a:t>
+            </a:r>
+          </a:p>
+        </p:txBody>
+      </p:sp>
+      <p:sp>
+        <p:nvSpPr>
+          <p:cNvPr id="6" name="13">
+            <a:extLst>
+              <a:ext uri="{FF2B5EF4-FFF2-40B4-BE49-F238E27FC236}">
+                <a16:creationId xmlns:a16="http://schemas.microsoft.com/office/drawing/2014/main" id="{7ECA40D9-94E9-45AF-BE19-F633EA7F60E3}"/>
+              </a:ext>
+            </a:extLst>
+          </p:cNvPr>
+          <p:cNvSpPr>
+            <a:spLocks noGrp="1"/>
+          </p:cNvSpPr>
+          <p:nvPr/>
+        </p:nvSpPr>
+        <p:spPr>
+          <a:xfrm>
+            <a:off x="8191500" y="6438900"/>
+            <a:ext cx="523875" cy="285750"/>
+          </a:xfrm>
+          <a:prstGeom prst="rect">
+            <a:avLst/>
+          </a:prstGeom>
+          <a:noFill/>
+          <a:ln w="0">
+            <a:noFill/>
+          </a:ln>
+        </p:spPr>
+        <p:txBody>
+          <a:bodyPr wrap="square" lIns="0" tIns="0" rIns="0" bIns="0" anchor="t">
+            <a:noAutofit/>
+          </a:bodyPr>
+          <a:lstStyle/>
+          <a:p>
+            <a:pPr algn="r">
+              <a:buNone/>
+              <a:defRPr sz="1500" b="0">
+                <a:solidFill>
+                  <a:srgbClr val="FFFFFF"/>
+                </a:solidFill>
+                <a:latin typeface="Calibri"/>
+                <a:ea typeface="Calibri"/>
+                <a:cs typeface="Calibri"/>
+              </a:defRPr>
+            </a:pPr>
+            <a:r>
+              <a:rPr sz="1500" b="0">
+                <a:solidFill>
+                  <a:srgbClr val="FFFFFF"/>
+                </a:solidFill>
+                <a:latin typeface="Calibri"/>
+                <a:ea typeface="Calibri"/>
+                <a:cs typeface="Calibri"/>
+              </a:rPr>
+              <a:t>35</a:t>
+            </a:r>
+          </a:p>
+        </p:txBody>
+      </p:sp>
+      <p:pic>
+        <p:nvPicPr>
+          <p:cNvPr id="9" name="Figur: Generator 6,6 kV med neutralpunkten jord" descr="Generator 6,6 kV med neutralpunkten jordad via ett motstånd och ett jordfelsrelä; ett jordfel på L1 ger en felström genom skrovet och motståndet, begränsad av motståndet"/>
+          <p:cNvPicPr>
+            <a:picLocks noChangeAspect="1"/>
+          </p:cNvPicPr>
+          <p:nvPr/>
+        </p:nvPicPr>
+        <p:blipFill>
+          <a:blip r:embed="rId3"/>
+          <a:stretch>
+            <a:fillRect/>
+          </a:stretch>
+        </p:blipFill>
+        <p:spPr>
+          <a:xfrm>
+            <a:off x="4892040" y="1645920"/>
+            <a:ext cx="3886200" cy="3071293"/>
+          </a:xfrm>
+          <a:prstGeom prst="rect">
+            <a:avLst/>
+          </a:prstGeom>
+        </p:spPr>
+      </p:pic>
+    </p:spTree>
+  </p:cSld>
+  <p:clrMapOvr>
+    <a:masterClrMapping/>
+  </p:clrMapOvr>
+</p:sld>
+</file>
+
+<file path=ppt/slides/slide36.xml><?xml version="1.0" encoding="utf-8"?>
 <p:sld xmlns:p="http://schemas.openxmlformats.org/presentationml/2006/main">
   <p:cSld>
     <p:spTree>
@@ -14548,7 +14953,7 @@
                 <a:ea typeface="Calibri"/>
                 <a:cs typeface="Calibri"/>
               </a:rPr>
-              <a:t>35</a:t>
+              <a:t>36</a:t>
             </a:r>
           </a:p>
         </p:txBody>
@@ -14563,7 +14968,7 @@
 </p:sld>
 </file>
 
-<file path=ppt/slides/slide36.xml><?xml version="1.0" encoding="utf-8"?>
+<file path=ppt/slides/slide37.xml><?xml version="1.0" encoding="utf-8"?>
 <p:sld xmlns:p="http://schemas.openxmlformats.org/presentationml/2006/main">
   <p:cSld>
     <p:spTree>
@@ -15028,7 +15433,7 @@
                 <a:ea typeface="Calibri"/>
                 <a:cs typeface="Calibri"/>
               </a:rPr>
-              <a:t>36</a:t>
+              <a:t>37</a:t>
             </a:r>
           </a:p>
         </p:txBody>

--- a/sjoskolan/vecka-44/aktuell/v44_02_Hogspanningssystem_elev.pptx
+++ b/sjoskolan/vecka-44/aktuell/v44_02_Hogspanningssystem_elev.pptx
@@ -3904,7 +3904,7 @@
                 <a:ea typeface="Calibri"/>
                 <a:cs typeface="Calibri"/>
               </a:rPr>
-              <a:t>AC och DC har olika gränser i kursens terminologi. 1 kV = 1 000 V.</a:t>
+              <a:t>AC och DC har olika gränser. 1 kV = 1 000 V.</a:t>
             </a:r>
           </a:p>
         </p:txBody>
@@ -3961,7 +3961,7 @@
                 <a:ea typeface="Calibri"/>
                 <a:cs typeface="Calibri"/>
               </a:rPr>
-              <a:t>Förutsättningar: Jämför 690 V AC, 6,6 kV AC och 1 200 V DC. Ordet över innebär strikt större än gränsen.</a:t>
+              <a:t>Förutsättningar: Jämför 690 V AC, 6,6 kV AC och 1 200 V DC. ”Över” betyder större än gränsen, inte lika med.</a:t>
             </a:r>
           </a:p>
         </p:txBody>
@@ -4018,7 +4018,7 @@
                 <a:ea typeface="Calibri"/>
                 <a:cs typeface="Calibri"/>
               </a:rPr>
-              <a:t>Arbetsgång: Omvandla till samma enhet och jämför varje värde med rätt AC- eller DC-gräns.</a:t>
+              <a:t>Arbetsgång: Gör om till samma enhet och jämför varje värde med rätt gräns.</a:t>
             </a:r>
           </a:p>
         </p:txBody>
@@ -4295,7 +4295,7 @@
                 <a:ea typeface="Calibri"/>
                 <a:cs typeface="Calibri"/>
               </a:rPr>
-              <a:t>Vilka av följande klassas som högspänning med kursens gränser: 690 V AC, 6,6 kV AC, 1 200 V DC?</a:t>
+              <a:t>Vilka av följande klassas som högspänning med bokens gränser: 690 V AC, 6,6 kV AC, 1 200 V DC?</a:t>
             </a:r>
           </a:p>
         </p:txBody>
@@ -4672,7 +4672,7 @@
                 <a:ea typeface="Calibri"/>
                 <a:cs typeface="Calibri"/>
               </a:rPr>
-              <a:t>P är aktiv trefaseffekt i W. U</a:t>
+              <a:t>P är den aktiva effekten i W, U</a:t>
             </a:r>
             <a:r>
               <a:rPr sz="2100" b="0" baseline="-25000">
@@ -4694,7 +4694,7 @@
                 <a:ea typeface="Calibri"/>
                 <a:cs typeface="Calibri"/>
               </a:rPr>
-              <a:t> är linjespänning i V RMS och I</a:t>
+              <a:t> linjespänningen i V och I</a:t>
             </a:r>
             <a:r>
               <a:rPr sz="2100" b="0" baseline="-25000">
@@ -4716,7 +4716,7 @@
                 <a:ea typeface="Calibri"/>
                 <a:cs typeface="Calibri"/>
               </a:rPr>
-              <a:t> linjeström i A RMS.</a:t>
+              <a:t> linjeströmmen i A.</a:t>
             </a:r>
           </a:p>
         </p:txBody>
@@ -4852,7 +4852,7 @@
                 <a:ea typeface="Calibri"/>
                 <a:cs typeface="Calibri"/>
               </a:rPr>
-              <a:t>Arbetsgång: Omvandla MW till W och kV till V. Sätt därefter in värdena.</a:t>
+              <a:t>Arbetsgång: Gör om MW till W och kV till V och sätt in värdena.</a:t>
             </a:r>
           </a:p>
         </p:txBody>
@@ -5151,7 +5151,7 @@
                 <a:ea typeface="Calibri"/>
                 <a:cs typeface="Calibri"/>
               </a:rPr>
-              <a:t> = 6,6 kV och PF = 0,90. Beräkna linjeström.</a:t>
+              <a:t> = 6,6 kV och PF = 0,90. Beräkna linjeströmmen.</a:t>
             </a:r>
           </a:p>
         </p:txBody>
@@ -5661,7 +5661,7 @@
                 <a:ea typeface="Calibri"/>
                 <a:cs typeface="Calibri"/>
               </a:rPr>
-              <a:t>Vid samma P och PF är strömmen omvänt proportionell mot linjespänningen.</a:t>
+              <a:t>Vid samma P och PF blir strömmen lika många gånger större som spänningen blir lägre.</a:t>
             </a:r>
           </a:p>
         </p:txBody>
@@ -5775,7 +5775,7 @@
                 <a:ea typeface="Calibri"/>
                 <a:cs typeface="Calibri"/>
               </a:rPr>
-              <a:t>Arbetsgång: Beräkna strömmen vid 400 V. Använd spänningskvoten för att kontrollera jämförelsen.</a:t>
+              <a:t>Arbetsgång: Räkna ut strömmen vid 400 V och kontrollera med kvoten mellan spänningarna.</a:t>
             </a:r>
           </a:p>
         </p:txBody>
@@ -6328,7 +6328,7 @@
                 <a:ea typeface="Calibri"/>
                 <a:cs typeface="Calibri"/>
               </a:rPr>
-              <a:t>k</a:t>
+              <a:t>kI = I</a:t>
             </a:r>
             <a:r>
               <a:rPr sz="2400" b="1" baseline="-25000">
@@ -6339,7 +6339,7 @@
                 <a:ea typeface="Calibri"/>
                 <a:cs typeface="Calibri"/>
               </a:rPr>
-              <a:t>I</a:t>
+              <a:t>1</a:t>
             </a:r>
             <a:r>
               <a:rPr sz="2400" b="1">
@@ -6350,7 +6350,18 @@
                 <a:ea typeface="Calibri"/>
                 <a:cs typeface="Calibri"/>
               </a:rPr>
-              <a:t> = I₁,märk/I₂,märk     I₂ = I₁/</a:t>
+              <a:t>,märk/I</a:t>
+            </a:r>
+            <a:r>
+              <a:rPr sz="2400" b="1" baseline="-25000">
+                <a:solidFill>
+                  <a:srgbClr val="064F91"/>
+                </a:solidFill>
+                <a:latin typeface="Calibri"/>
+                <a:ea typeface="Calibri"/>
+                <a:cs typeface="Calibri"/>
+              </a:rPr>
+              <a:t>2</a:t>
             </a:r>
             <a:r>
               <a:rPr sz="2400" b="1">
@@ -6361,7 +6372,7 @@
                 <a:ea typeface="Calibri"/>
                 <a:cs typeface="Calibri"/>
               </a:rPr>
-              <a:t>k</a:t>
+              <a:t>,märk; I</a:t>
             </a:r>
             <a:r>
               <a:rPr sz="2400" b="1" baseline="-25000">
@@ -6372,7 +6383,40 @@
                 <a:ea typeface="Calibri"/>
                 <a:cs typeface="Calibri"/>
               </a:rPr>
-              <a:t>I</a:t>
+              <a:t>2</a:t>
+            </a:r>
+            <a:r>
+              <a:rPr sz="2400" b="1">
+                <a:solidFill>
+                  <a:srgbClr val="064F91"/>
+                </a:solidFill>
+                <a:latin typeface="Calibri"/>
+                <a:ea typeface="Calibri"/>
+                <a:cs typeface="Calibri"/>
+              </a:rPr>
+              <a:t> = I</a:t>
+            </a:r>
+            <a:r>
+              <a:rPr sz="2400" b="1" baseline="-25000">
+                <a:solidFill>
+                  <a:srgbClr val="064F91"/>
+                </a:solidFill>
+                <a:latin typeface="Calibri"/>
+                <a:ea typeface="Calibri"/>
+                <a:cs typeface="Calibri"/>
+              </a:rPr>
+              <a:t>1</a:t>
+            </a:r>
+            <a:r>
+              <a:rPr sz="2400" b="1">
+                <a:solidFill>
+                  <a:srgbClr val="064F91"/>
+                </a:solidFill>
+                <a:latin typeface="Calibri"/>
+                <a:ea typeface="Calibri"/>
+                <a:cs typeface="Calibri"/>
+              </a:rPr>
+              <a:t>/kI</a:t>
             </a:r>
           </a:p>
         </p:txBody>
@@ -6429,29 +6473,7 @@
                 <a:ea typeface="Calibri"/>
                 <a:cs typeface="Calibri"/>
               </a:rPr>
-              <a:t>k</a:t>
-            </a:r>
-            <a:r>
-              <a:rPr sz="2100" b="0" baseline="-25000">
-                <a:solidFill>
-                  <a:srgbClr val="111111"/>
-                </a:solidFill>
-                <a:latin typeface="Calibri"/>
-                <a:ea typeface="Calibri"/>
-                <a:cs typeface="Calibri"/>
-              </a:rPr>
-              <a:t>I</a:t>
-            </a:r>
-            <a:r>
-              <a:rPr sz="2100" b="0">
-                <a:solidFill>
-                  <a:srgbClr val="111111"/>
-                </a:solidFill>
-                <a:latin typeface="Calibri"/>
-                <a:ea typeface="Calibri"/>
-                <a:cs typeface="Calibri"/>
-              </a:rPr>
-              <a:t> är strömomsättning utan enhet. Index 1 är primär och 2 sekundär.</a:t>
+              <a:t>kI är omsättningen och saknar enhet; 1 är primärsidan och 2 sekundärsidan.</a:t>
             </a:r>
           </a:p>
         </p:txBody>
@@ -6508,7 +6530,29 @@
                 <a:ea typeface="Calibri"/>
                 <a:cs typeface="Calibri"/>
               </a:rPr>
-              <a:t>Förutsättningar: Ideal strömtransformator 200/5 A. Primärström I₁ = 120 A. Endast räkning på givna data.</a:t>
+              <a:t>Förutsättningar: Ideal strömtransformator 200/5 A. Primärströmmen I</a:t>
+            </a:r>
+            <a:r>
+              <a:rPr sz="2025" b="0" baseline="-25000">
+                <a:solidFill>
+                  <a:srgbClr val="111111"/>
+                </a:solidFill>
+                <a:latin typeface="Calibri"/>
+                <a:ea typeface="Calibri"/>
+                <a:cs typeface="Calibri"/>
+              </a:rPr>
+              <a:t>1</a:t>
+            </a:r>
+            <a:r>
+              <a:rPr sz="2025" b="0">
+                <a:solidFill>
+                  <a:srgbClr val="111111"/>
+                </a:solidFill>
+                <a:latin typeface="Calibri"/>
+                <a:ea typeface="Calibri"/>
+                <a:cs typeface="Calibri"/>
+              </a:rPr>
+              <a:t> = 120 A. Uppgiften gäller bara beräkningen.</a:t>
             </a:r>
           </a:p>
         </p:txBody>
@@ -6565,7 +6609,7 @@
                 <a:ea typeface="Calibri"/>
                 <a:cs typeface="Calibri"/>
               </a:rPr>
-              <a:t>Arbetsgång: Beräkna omsättningen först. Dividera därefter aktuell primärström med omsättningen.</a:t>
+              <a:t>Arbetsgång: Räkna först ut omsättningen och dela sedan primärströmmen med den.</a:t>
             </a:r>
           </a:p>
         </p:txBody>
@@ -6842,7 +6886,7 @@
                 <a:ea typeface="Calibri"/>
                 <a:cs typeface="Calibri"/>
               </a:rPr>
-              <a:t>En ideal strömtransformator har omsättningen 200/5 A. Primärströmmen är 120 A. Beräkna sekundärström.</a:t>
+              <a:t>En ideal strömtransformator har omsättningen 200/5 A. Primärströmmen är 120 A. Beräkna sekundärströmmen.</a:t>
             </a:r>
           </a:p>
         </p:txBody>
@@ -7199,7 +7243,7 @@
                 <a:ea typeface="Calibri"/>
                 <a:cs typeface="Calibri"/>
               </a:rPr>
-              <a:t>Mättransformatorn ger signal. Skyddsreläet bedömer den. Brytaren utför ett givet utlösningskommando.</a:t>
+              <a:t>Mättransformatorn ger en signal, skyddsreläet bedömer den och brytaren bryter när den får kommando.</a:t>
             </a:r>
           </a:p>
         </p:txBody>
@@ -7256,7 +7300,7 @@
                 <a:ea typeface="Calibri"/>
                 <a:cs typeface="Calibri"/>
               </a:rPr>
-              <a:t>Förutsättningar: Förenklad signalväg i ett reläskyddssystem.</a:t>
+              <a:t>Förutsättningar: En förenklad bild av ett reläskydd.</a:t>
             </a:r>
           </a:p>
         </p:txBody>
@@ -7313,7 +7357,7 @@
                 <a:ea typeface="Calibri"/>
                 <a:cs typeface="Calibri"/>
               </a:rPr>
-              <a:t>Arbetsgång: Ordna delarna enligt deras funktion från strömmätning till frånkopplad kraftväg.</a:t>
+              <a:t>Arbetsgång: Sätt delarna i ordning från mätning till bortkoppling.</a:t>
             </a:r>
           </a:p>
         </p:txBody>
@@ -10354,7 +10398,7 @@
                 <a:ea typeface="Calibri"/>
                 <a:cs typeface="Calibri"/>
               </a:rPr>
-              <a:t>En frånskiljare behöver inte vara avsedd för att bryta last- eller kortslutningsström.</a:t>
+              <a:t>En frånskiljare är inte nödvändigtvis gjord för att bryta last- eller kortslutningsström.</a:t>
             </a:r>
           </a:p>
         </p:txBody>
@@ -10411,7 +10455,7 @@
                 <a:ea typeface="Calibri"/>
                 <a:cs typeface="Calibri"/>
               </a:rPr>
-              <a:t>Förutsättningar: Inga apparatdata anger tillåten brytförmåga i fallet.</a:t>
+              <a:t>Förutsättningar: Det finns inga apparatdata om vad frånskiljaren får bryta.</a:t>
             </a:r>
           </a:p>
         </p:txBody>
@@ -10468,7 +10512,7 @@
                 <a:ea typeface="Calibri"/>
                 <a:cs typeface="Calibri"/>
               </a:rPr>
-              <a:t>Arbetsgång: Förklara vilken märkning eller dokumentation som behövs innan man bedömer tillåten manöver.</a:t>
+              <a:t>Arbetsgång: Förklara vilken märkning eller dokumentation som behövs innan du vet vad den får användas till.</a:t>
             </a:r>
           </a:p>
         </p:txBody>
@@ -11078,7 +11122,7 @@
                 <a:ea typeface="Calibri"/>
                 <a:cs typeface="Calibri"/>
               </a:rPr>
-              <a:t>Ett stopp från en förregling är information om driftläge, villkor eller möjlig avvikelse.</a:t>
+              <a:t>När en förregling stoppar en manöver säger den något om driftläget eller om ett villkor som inte är uppfyllt.</a:t>
             </a:r>
           </a:p>
         </p:txBody>
@@ -11192,7 +11236,7 @@
                 <a:ea typeface="Calibri"/>
                 <a:cs typeface="Calibri"/>
               </a:rPr>
-              <a:t>Arbetsgång: Ange att orsaken och driftläget ska utredas enligt instruktion. Beskriv ingen förbikoppling.</a:t>
+              <a:t>Arbetsgång: Svara att orsaken ska utredas enligt instruktionen. Beskriv inte hur förreglingen kan förbikopplas.</a:t>
             </a:r>
           </a:p>
         </p:txBody>
@@ -11802,7 +11846,7 @@
                 <a:ea typeface="Calibri"/>
                 <a:cs typeface="Calibri"/>
               </a:rPr>
-              <a:t>Avstånd ska täcka även verktyg, material och möjliga rörelser i det faktiska arbetsområdet.</a:t>
+              <a:t>Avståndet ska räcka även för verktyg, material och de rörelser som kan behövas.</a:t>
             </a:r>
           </a:p>
         </p:txBody>
@@ -11859,7 +11903,7 @@
                 <a:ea typeface="Calibri"/>
                 <a:cs typeface="Calibri"/>
               </a:rPr>
-              <a:t>Förutsättningar: Förslaget ”en meter” saknar spänningsnivå och fastställd arbetsmetod.</a:t>
+              <a:t>Förutsättningar: Till ”en meter” finns ingen spänningsnivå och ingen fastställd arbetsmetod.</a:t>
             </a:r>
           </a:p>
         </p:txBody>
@@ -11916,7 +11960,7 @@
                 <a:ea typeface="Calibri"/>
                 <a:cs typeface="Calibri"/>
               </a:rPr>
-              <a:t>Arbetsgång: Ange vilka uppgifter som saknas. Ingen numerisk avståndsberäkning kan göras med dessa data.</a:t>
+              <a:t>Arbetsgång: Ange vilka uppgifter som saknas. Det går inte att räkna fram något avstånd med de här uppgifterna.</a:t>
             </a:r>
           </a:p>
         </p:txBody>
@@ -12707,7 +12751,7 @@
                 <a:ea typeface="Calibri"/>
                 <a:cs typeface="Calibri"/>
               </a:rPr>
-              <a:t>En kollega anger ”en meter brukar räcka” utan spänningsnivå eller arbetsmetod. Räcker det som arbetsgräns?</a:t>
+              <a:t>En kollega säger att ”en meter brukar räcka”, men nämner varken spänning eller arbetsmetod. Duger det som arbetsgräns?</a:t>
             </a:r>
           </a:p>
         </p:txBody>
@@ -13040,7 +13084,7 @@
                 <a:ea typeface="Calibri"/>
                 <a:cs typeface="Calibri"/>
               </a:rPr>
-              <a:t>Utan huvudvägar och källor kan aktuell elektrisk koppling och möjlig återspänningssättning vara okänd.</a:t>
+              <a:t>Utan schema över matningar och källor vet du inte hur anläggningen är kopplad eller om spänningen kan komma tillbaka.</a:t>
             </a:r>
           </a:p>
         </p:txBody>
@@ -13097,7 +13141,7 @@
                 <a:ea typeface="Calibri"/>
                 <a:cs typeface="Calibri"/>
               </a:rPr>
-              <a:t>Förutsättningar: HV-fallet saknar aktuellt enlinjeschema och uppgift om reservmatning.</a:t>
+              <a:t>Förutsättningar: Ett aktuellt enlinjeschema och uppgift om reservmatning saknas.</a:t>
             </a:r>
           </a:p>
         </p:txBody>
@@ -13154,7 +13198,7 @@
                 <a:ea typeface="Calibri"/>
                 <a:cs typeface="Calibri"/>
               </a:rPr>
-              <a:t>Arbetsgång: Identifiera två osäkerheter och koppla dem till vilken verifiering som inte går att göra.</a:t>
+              <a:t>Arbetsgång: Ange två osäkerheter och vilken kontroll var och en gör omöjlig.</a:t>
             </a:r>
           </a:p>
         </p:txBody>
@@ -13431,7 +13475,7 @@
                 <a:ea typeface="Calibri"/>
                 <a:cs typeface="Calibri"/>
               </a:rPr>
-              <a:t>Ett HV-arbetsfall saknar enlinjeschema och uppgift om reservmatning. Vilka två osäkerheter uppstår?</a:t>
+              <a:t>Till ett arbete i en högspänningsanläggning finns varken enlinjeschema eller uppgift om reservmatning. Vilka två osäkerheter uppstår?</a:t>
             </a:r>
           </a:p>
         </p:txBody>
@@ -13764,7 +13808,7 @@
                 <a:ea typeface="Calibri"/>
                 <a:cs typeface="Calibri"/>
               </a:rPr>
-              <a:t>Reläinställning, mätdata och brytarnas tidsordning visar hur bortkopplingen uppstod.</a:t>
+              <a:t>Reläinställningar, mätvärden och i vilken ordning brytarna löste visar vad som hände.</a:t>
             </a:r>
           </a:p>
         </p:txBody>
@@ -13821,7 +13865,7 @@
                 <a:ea typeface="Calibri"/>
                 <a:cs typeface="Calibri"/>
               </a:rPr>
-              <a:t>Förutsättningar: Ett lokalt fel kopplar bort två friska fördelningar. Exakt orsak är inte känd.</a:t>
+              <a:t>Förutsättningar: Ett fel på ett ställe kopplar bort två felfria fördelningar. Orsaken är inte känd.</a:t>
             </a:r>
           </a:p>
         </p:txBody>
@@ -13878,7 +13922,7 @@
                 <a:ea typeface="Calibri"/>
                 <a:cs typeface="Calibri"/>
               </a:rPr>
-              <a:t>Arbetsgång: Ange vilka data som behövs för att skilja fel inställning, fel signal och felaktigt brytförlopp.</a:t>
+              <a:t>Arbetsgång: Ange vilka data som behövs för att skilja mellan fel inställning, fel signal och en brytare som inte fungerade som den skulle.</a:t>
             </a:r>
           </a:p>
         </p:txBody>
@@ -14155,7 +14199,7 @@
                 <a:ea typeface="Calibri"/>
                 <a:cs typeface="Calibri"/>
               </a:rPr>
-              <a:t>Ett lokalt fel släcker två friska fördelningar. Vilka delar av analysen bör utredas?</a:t>
+              <a:t>Ett fel på ett ställe gör att två felfria fördelningar slocknar. Vad bör utredas?</a:t>
             </a:r>
           </a:p>
         </p:txBody>

--- a/sjoskolan/vecka-44/aktuell/v44_02_Hogspanningssystem_elev.pptx
+++ b/sjoskolan/vecka-44/aktuell/v44_02_Hogspanningssystem_elev.pptx
@@ -3790,7 +3790,7 @@
                 <a:ea typeface="Calibri"/>
                 <a:cs typeface="Calibri"/>
               </a:rPr>
-              <a:t>Stöd till övning 1</a:t>
+              <a:t>Stöd till övning 2.1</a:t>
             </a:r>
           </a:p>
         </p:txBody>
@@ -4179,7 +4179,7 @@
                 <a:ea typeface="Calibri"/>
                 <a:cs typeface="Calibri"/>
               </a:rPr>
-              <a:t>Övning 1</a:t>
+              <a:t>Övning 2.1</a:t>
             </a:r>
           </a:p>
         </p:txBody>
@@ -4514,7 +4514,7 @@
                 <a:ea typeface="Calibri"/>
                 <a:cs typeface="Calibri"/>
               </a:rPr>
-              <a:t>Stöd till övning 2</a:t>
+              <a:t>Stöd till övning 2.2</a:t>
             </a:r>
           </a:p>
         </p:txBody>
@@ -5013,7 +5013,7 @@
                 <a:ea typeface="Calibri"/>
                 <a:cs typeface="Calibri"/>
               </a:rPr>
-              <a:t>Övning 2</a:t>
+              <a:t>Övning 2.2</a:t>
             </a:r>
           </a:p>
         </p:txBody>
@@ -5370,7 +5370,7 @@
                 <a:ea typeface="Calibri"/>
                 <a:cs typeface="Calibri"/>
               </a:rPr>
-              <a:t>Stöd till övning 3</a:t>
+              <a:t>Stöd till övning 2.3</a:t>
             </a:r>
           </a:p>
         </p:txBody>
@@ -5936,7 +5936,7 @@
                 <a:ea typeface="Calibri"/>
                 <a:cs typeface="Calibri"/>
               </a:rPr>
-              <a:t>Övning 3</a:t>
+              <a:t>Övning 2.3</a:t>
             </a:r>
           </a:p>
         </p:txBody>
@@ -6271,7 +6271,7 @@
                 <a:ea typeface="Calibri"/>
                 <a:cs typeface="Calibri"/>
               </a:rPr>
-              <a:t>Stöd till övning 4</a:t>
+              <a:t>Stöd till övning 2.4</a:t>
             </a:r>
           </a:p>
         </p:txBody>
@@ -6770,7 +6770,7 @@
                 <a:ea typeface="Calibri"/>
                 <a:cs typeface="Calibri"/>
               </a:rPr>
-              <a:t>Övning 4</a:t>
+              <a:t>Övning 2.4</a:t>
             </a:r>
           </a:p>
         </p:txBody>
@@ -7129,7 +7129,7 @@
                 <a:ea typeface="Calibri"/>
                 <a:cs typeface="Calibri"/>
               </a:rPr>
-              <a:t>Stöd till övning 5</a:t>
+              <a:t>Stöd till övning 2.5</a:t>
             </a:r>
           </a:p>
         </p:txBody>
@@ -7518,7 +7518,7 @@
                 <a:ea typeface="Calibri"/>
                 <a:cs typeface="Calibri"/>
               </a:rPr>
-              <a:t>Övning 5</a:t>
+              <a:t>Övning 2.5</a:t>
             </a:r>
           </a:p>
         </p:txBody>
@@ -10284,7 +10284,7 @@
                 <a:ea typeface="Calibri"/>
                 <a:cs typeface="Calibri"/>
               </a:rPr>
-              <a:t>Stöd till övning 6</a:t>
+              <a:t>Stöd till övning 2.6</a:t>
             </a:r>
           </a:p>
         </p:txBody>
@@ -10673,7 +10673,7 @@
                 <a:ea typeface="Calibri"/>
                 <a:cs typeface="Calibri"/>
               </a:rPr>
-              <a:t>Övning 6</a:t>
+              <a:t>Övning 2.6</a:t>
             </a:r>
           </a:p>
         </p:txBody>
@@ -11008,7 +11008,7 @@
                 <a:ea typeface="Calibri"/>
                 <a:cs typeface="Calibri"/>
               </a:rPr>
-              <a:t>Stöd till övning 7</a:t>
+              <a:t>Stöd till övning 2.7</a:t>
             </a:r>
           </a:p>
         </p:txBody>
@@ -11397,7 +11397,7 @@
                 <a:ea typeface="Calibri"/>
                 <a:cs typeface="Calibri"/>
               </a:rPr>
-              <a:t>Övning 7</a:t>
+              <a:t>Övning 2.7</a:t>
             </a:r>
           </a:p>
         </p:txBody>
@@ -11732,7 +11732,7 @@
                 <a:ea typeface="Calibri"/>
                 <a:cs typeface="Calibri"/>
               </a:rPr>
-              <a:t>Stöd till övning 8</a:t>
+              <a:t>Stöd till övning 2.8</a:t>
             </a:r>
           </a:p>
         </p:txBody>
@@ -12635,7 +12635,7 @@
                 <a:ea typeface="Calibri"/>
                 <a:cs typeface="Calibri"/>
               </a:rPr>
-              <a:t>Övning 8</a:t>
+              <a:t>Övning 2.8</a:t>
             </a:r>
           </a:p>
         </p:txBody>
@@ -12970,7 +12970,7 @@
                 <a:ea typeface="Calibri"/>
                 <a:cs typeface="Calibri"/>
               </a:rPr>
-              <a:t>Stöd till övning 9</a:t>
+              <a:t>Stöd till övning 2.9</a:t>
             </a:r>
           </a:p>
         </p:txBody>
@@ -13359,7 +13359,7 @@
                 <a:ea typeface="Calibri"/>
                 <a:cs typeface="Calibri"/>
               </a:rPr>
-              <a:t>Övning 9</a:t>
+              <a:t>Övning 2.9</a:t>
             </a:r>
           </a:p>
         </p:txBody>
@@ -13694,7 +13694,7 @@
                 <a:ea typeface="Calibri"/>
                 <a:cs typeface="Calibri"/>
               </a:rPr>
-              <a:t>Stöd till övning 10</a:t>
+              <a:t>Stöd till övning 2.10</a:t>
             </a:r>
           </a:p>
         </p:txBody>
@@ -14083,7 +14083,7 @@
                 <a:ea typeface="Calibri"/>
                 <a:cs typeface="Calibri"/>
               </a:rPr>
-              <a:t>Övning 10</a:t>
+              <a:t>Övning 2.10</a:t>
             </a:r>
           </a:p>
         </p:txBody>

--- a/sjoskolan/vecka-44/aktuell/v44_02_Hogspanningssystem_elev.pptx
+++ b/sjoskolan/vecka-44/aktuell/v44_02_Hogspanningssystem_elev.pptx
@@ -8412,7 +8412,7 @@
                 <a:ea typeface="Calibri"/>
                 <a:cs typeface="Calibri"/>
               </a:rPr>
-              <a:t>Teori och exempel följs av övning 6–10.</a:t>
+              <a:t>Teori och exempel följs av övning 2.6–2.10.</a:t>
             </a:r>
           </a:p>
           <a:p xmlns:a="http://schemas.openxmlformats.org/drawingml/2006/main">
@@ -12257,7 +12257,7 @@
                 <a:ea typeface="Calibri"/>
                 <a:cs typeface="Calibri"/>
               </a:rPr>
-              <a:t>15 min övning 1, 2, 4, 5 min återkoppling</a:t>
+              <a:t>15 min övning 2.1, 2.2 och 2.4, 5 min återkoppling</a:t>
             </a:r>
           </a:p>
         </p:txBody>
@@ -12371,7 +12371,7 @@
                 <a:ea typeface="Calibri"/>
                 <a:cs typeface="Calibri"/>
               </a:rPr>
-              <a:t>20 min teori och exempel, 15 min övning 6, 7, 8</a:t>
+              <a:t>20 min teori och exempel, 15 min övning 2.6, 2.7 och 2.8</a:t>
             </a:r>
           </a:p>
           <a:p xmlns:a="http://schemas.openxmlformats.org/drawingml/2006/main">

--- a/sjoskolan/vecka-44/aktuell/v44_02_Hogspanningssystem_elev.pptx
+++ b/sjoskolan/vecka-44/aktuell/v44_02_Hogspanningssystem_elev.pptx
@@ -9885,7 +9885,51 @@
                 <a:ea typeface="Calibri"/>
                 <a:cs typeface="Calibri"/>
               </a:rPr>
-              <a:t> = I₁,märk/I₂,märk     I₂ = I₁/</a:t>
+              <a:t> = I</a:t>
+            </a:r>
+            <a:r>
+              <a:rPr sz="2325" b="1" baseline="-25000">
+                <a:solidFill>
+                  <a:srgbClr val="064F91"/>
+                </a:solidFill>
+                <a:latin typeface="Calibri"/>
+                <a:ea typeface="Calibri"/>
+                <a:cs typeface="Calibri"/>
+              </a:rPr>
+              <a:t>1,märk</a:t>
+            </a:r>
+            <a:r>
+              <a:rPr sz="2325" b="1">
+                <a:solidFill>
+                  <a:srgbClr val="064F91"/>
+                </a:solidFill>
+                <a:latin typeface="Calibri"/>
+                <a:ea typeface="Calibri"/>
+                <a:cs typeface="Calibri"/>
+              </a:rPr>
+              <a:t>/I</a:t>
+            </a:r>
+            <a:r>
+              <a:rPr sz="2325" b="1" baseline="-25000">
+                <a:solidFill>
+                  <a:srgbClr val="064F91"/>
+                </a:solidFill>
+                <a:latin typeface="Calibri"/>
+                <a:ea typeface="Calibri"/>
+                <a:cs typeface="Calibri"/>
+              </a:rPr>
+              <a:t>2,märk</a:t>
+            </a:r>
+            <a:r>
+              <a:rPr sz="2325" b="1">
+                <a:solidFill>
+                  <a:srgbClr val="064F91"/>
+                </a:solidFill>
+                <a:latin typeface="Calibri"/>
+                <a:ea typeface="Calibri"/>
+                <a:cs typeface="Calibri"/>
+              </a:rPr>
+              <a:t>     I₂ = I₁/</a:t>
             </a:r>
             <a:r>
               <a:rPr sz="2325" b="1">

--- a/sjoskolan/vecka-44/aktuell/v44_02_Hogspanningssystem_elev.pptx
+++ b/sjoskolan/vecka-44/aktuell/v44_02_Hogspanningssystem_elev.pptx
@@ -5718,7 +5718,7 @@
                 <a:ea typeface="Calibri"/>
                 <a:cs typeface="Calibri"/>
               </a:rPr>
-              <a:t>Förutsättningar: P = 1,0 MW och PF = 0,90. Jämför 400 V med 6 600 V.</a:t>
+              <a:t>Förutsättningar: Jämförelse med ett landnät på 400 V. P = 1,0 MW och PF = 0,90. Jämför 400 V med 6 600 V.</a:t>
             </a:r>
           </a:p>
         </p:txBody>

--- a/sjoskolan/vecka-44/aktuell/v44_02_Hogspanningssystem_elev.pptx
+++ b/sjoskolan/vecka-44/aktuell/v44_02_Hogspanningssystem_elev.pptx
@@ -6328,7 +6328,7 @@
                 <a:ea typeface="Calibri"/>
                 <a:cs typeface="Calibri"/>
               </a:rPr>
-              <a:t>kI = I</a:t>
+              <a:t>k</a:t>
             </a:r>
             <a:r>
               <a:rPr sz="2400" b="1" baseline="-25000">
@@ -6339,6 +6339,94 @@
                 <a:ea typeface="Calibri"/>
                 <a:cs typeface="Calibri"/>
               </a:rPr>
+              <a:t>I</a:t>
+            </a:r>
+            <a:r>
+              <a:rPr sz="2400" b="1">
+                <a:solidFill>
+                  <a:srgbClr val="064F91"/>
+                </a:solidFill>
+                <a:latin typeface="Calibri"/>
+                <a:ea typeface="Calibri"/>
+                <a:cs typeface="Calibri"/>
+              </a:rPr>
+              <a:t> = I</a:t>
+            </a:r>
+            <a:r>
+              <a:rPr sz="2400" b="1" baseline="-25000">
+                <a:solidFill>
+                  <a:srgbClr val="064F91"/>
+                </a:solidFill>
+                <a:latin typeface="Calibri"/>
+                <a:ea typeface="Calibri"/>
+                <a:cs typeface="Calibri"/>
+              </a:rPr>
+              <a:t>1,märk</a:t>
+            </a:r>
+            <a:r>
+              <a:rPr sz="2400" b="1">
+                <a:solidFill>
+                  <a:srgbClr val="064F91"/>
+                </a:solidFill>
+                <a:latin typeface="Calibri"/>
+                <a:ea typeface="Calibri"/>
+                <a:cs typeface="Calibri"/>
+              </a:rPr>
+              <a:t>/I</a:t>
+            </a:r>
+            <a:r>
+              <a:rPr sz="2400" b="1" baseline="-25000">
+                <a:solidFill>
+                  <a:srgbClr val="064F91"/>
+                </a:solidFill>
+                <a:latin typeface="Calibri"/>
+                <a:ea typeface="Calibri"/>
+                <a:cs typeface="Calibri"/>
+              </a:rPr>
+              <a:t>2,märk</a:t>
+            </a:r>
+            <a:r>
+              <a:rPr sz="2400" b="1">
+                <a:solidFill>
+                  <a:srgbClr val="064F91"/>
+                </a:solidFill>
+                <a:latin typeface="Calibri"/>
+                <a:ea typeface="Calibri"/>
+                <a:cs typeface="Calibri"/>
+              </a:rPr>
+              <a:t>; I</a:t>
+            </a:r>
+            <a:r>
+              <a:rPr sz="2400" b="1" baseline="-25000">
+                <a:solidFill>
+                  <a:srgbClr val="064F91"/>
+                </a:solidFill>
+                <a:latin typeface="Calibri"/>
+                <a:ea typeface="Calibri"/>
+                <a:cs typeface="Calibri"/>
+              </a:rPr>
+              <a:t>2</a:t>
+            </a:r>
+            <a:r>
+              <a:rPr sz="2400" b="1">
+                <a:solidFill>
+                  <a:srgbClr val="064F91"/>
+                </a:solidFill>
+                <a:latin typeface="Calibri"/>
+                <a:ea typeface="Calibri"/>
+                <a:cs typeface="Calibri"/>
+              </a:rPr>
+              <a:t> = I</a:t>
+            </a:r>
+            <a:r>
+              <a:rPr sz="2400" b="1" baseline="-25000">
+                <a:solidFill>
+                  <a:srgbClr val="064F91"/>
+                </a:solidFill>
+                <a:latin typeface="Calibri"/>
+                <a:ea typeface="Calibri"/>
+                <a:cs typeface="Calibri"/>
+              </a:rPr>
               <a:t>1</a:t>
             </a:r>
             <a:r>
@@ -6350,7 +6438,7 @@
                 <a:ea typeface="Calibri"/>
                 <a:cs typeface="Calibri"/>
               </a:rPr>
-              <a:t>,märk/I</a:t>
+              <a:t>/k</a:t>
             </a:r>
             <a:r>
               <a:rPr sz="2400" b="1" baseline="-25000">
@@ -6361,62 +6449,7 @@
                 <a:ea typeface="Calibri"/>
                 <a:cs typeface="Calibri"/>
               </a:rPr>
-              <a:t>2</a:t>
-            </a:r>
-            <a:r>
-              <a:rPr sz="2400" b="1">
-                <a:solidFill>
-                  <a:srgbClr val="064F91"/>
-                </a:solidFill>
-                <a:latin typeface="Calibri"/>
-                <a:ea typeface="Calibri"/>
-                <a:cs typeface="Calibri"/>
-              </a:rPr>
-              <a:t>,märk; I</a:t>
-            </a:r>
-            <a:r>
-              <a:rPr sz="2400" b="1" baseline="-25000">
-                <a:solidFill>
-                  <a:srgbClr val="064F91"/>
-                </a:solidFill>
-                <a:latin typeface="Calibri"/>
-                <a:ea typeface="Calibri"/>
-                <a:cs typeface="Calibri"/>
-              </a:rPr>
-              <a:t>2</a:t>
-            </a:r>
-            <a:r>
-              <a:rPr sz="2400" b="1">
-                <a:solidFill>
-                  <a:srgbClr val="064F91"/>
-                </a:solidFill>
-                <a:latin typeface="Calibri"/>
-                <a:ea typeface="Calibri"/>
-                <a:cs typeface="Calibri"/>
-              </a:rPr>
-              <a:t> = I</a:t>
-            </a:r>
-            <a:r>
-              <a:rPr sz="2400" b="1" baseline="-25000">
-                <a:solidFill>
-                  <a:srgbClr val="064F91"/>
-                </a:solidFill>
-                <a:latin typeface="Calibri"/>
-                <a:ea typeface="Calibri"/>
-                <a:cs typeface="Calibri"/>
-              </a:rPr>
-              <a:t>1</a:t>
-            </a:r>
-            <a:r>
-              <a:rPr sz="2400" b="1">
-                <a:solidFill>
-                  <a:srgbClr val="064F91"/>
-                </a:solidFill>
-                <a:latin typeface="Calibri"/>
-                <a:ea typeface="Calibri"/>
-                <a:cs typeface="Calibri"/>
-              </a:rPr>
-              <a:t>/kI</a:t>
+              <a:t>I</a:t>
             </a:r>
           </a:p>
         </p:txBody>
@@ -6473,7 +6506,29 @@
                 <a:ea typeface="Calibri"/>
                 <a:cs typeface="Calibri"/>
               </a:rPr>
-              <a:t>kI är omsättningen och saknar enhet; 1 är primärsidan och 2 sekundärsidan.</a:t>
+              <a:t>k</a:t>
+            </a:r>
+            <a:r>
+              <a:rPr sz="2100" b="0" baseline="-25000">
+                <a:solidFill>
+                  <a:srgbClr val="111111"/>
+                </a:solidFill>
+                <a:latin typeface="Calibri"/>
+                <a:ea typeface="Calibri"/>
+                <a:cs typeface="Calibri"/>
+              </a:rPr>
+              <a:t>I</a:t>
+            </a:r>
+            <a:r>
+              <a:rPr sz="2100" b="0">
+                <a:solidFill>
+                  <a:srgbClr val="111111"/>
+                </a:solidFill>
+                <a:latin typeface="Calibri"/>
+                <a:ea typeface="Calibri"/>
+                <a:cs typeface="Calibri"/>
+              </a:rPr>
+              <a:t> är omsättningen och saknar enhet; 1 är primärsidan och 2 sekundärsidan.</a:t>
             </a:r>
           </a:p>
         </p:txBody>
@@ -7634,7 +7689,7 @@
                 <a:ea typeface="Calibri"/>
                 <a:cs typeface="Calibri"/>
               </a:rPr>
-              <a:t>Ordna dessa funktioner i en signalväg: brytare, mättransformator, skyddsrelä. Vad händer om skyddsreläet saknar hjälpspänning?</a:t>
+              <a:t>a) Sätt delarna i rätt ordning, från mätning till bortkoppling: brytare, mättransformator, skyddsrelä. b) Skyddsreläet behöver egen matning (hjälpspänning). Vad händer om den försvinner?</a:t>
             </a:r>
           </a:p>
         </p:txBody>
@@ -9806,7 +9861,7 @@
                 <a:ea typeface="Calibri"/>
                 <a:cs typeface="Calibri"/>
               </a:rPr>
-              <a:t>En ideal strömtransformator är märkt 300/5 A. Primärströmmen är 150 A. Endast beräkning på data.</a:t>
+              <a:t>En ideal strömtransformator är märkt 400/5 A. Primärströmmen är 320 A. Endast beräkning på data.</a:t>
             </a:r>
           </a:p>
         </p:txBody>
@@ -10041,7 +10096,7 @@
                 <a:ea typeface="Calibri"/>
                 <a:cs typeface="Calibri"/>
               </a:rPr>
-              <a:t> = 300/5 = 60.</a:t>
+              <a:t> = 400/5 = 80.</a:t>
             </a:r>
           </a:p>
           <a:p xmlns:a="http://schemas.openxmlformats.org/drawingml/2006/main">
@@ -10064,7 +10119,7 @@
                 <a:ea typeface="Calibri"/>
                 <a:cs typeface="Calibri"/>
               </a:rPr>
-              <a:t>2. I₂ = 150/60 = 2,5 A.</a:t>
+              <a:t>2. I₂ = 320/80 = 4,0 A.</a:t>
             </a:r>
           </a:p>
           <a:p xmlns:a="http://schemas.openxmlformats.org/drawingml/2006/main">
@@ -10087,7 +10142,7 @@
                 <a:ea typeface="Calibri"/>
                 <a:cs typeface="Calibri"/>
               </a:rPr>
-              <a:t>3. Kontroll: 2,5/5 = 150/300 = 0,50 av märkström på båda sidor.</a:t>
+              <a:t>3. Kontroll: 4,0/5 = 320/400 = 0,80 av märkström på båda sidor.</a:t>
             </a:r>
           </a:p>
         </p:txBody>
@@ -10208,7 +10263,7 @@
       </p:sp>
       <p:pic xmlns:a="http://schemas.openxmlformats.org/drawingml/2006/main" xmlns:r="http://schemas.openxmlformats.org/officeDocument/2006/relationships">
         <p:nvPicPr>
-          <p:cNvPr id="16" name="Figur: Strömtransformator 300/5 A med primärstr" descr="Strömtransformator 300/5 A med primärström 150 A och sekundärström 2,5 A"/>
+          <p:cNvPr id="16" name="Figur: Strömtransformator 400/5 A med primärstr" descr="Strömtransformator 400/5 A med primärström 320 A och sekundärström 4,0 A"/>
           <p:cNvPicPr>
             <a:picLocks noChangeAspect="1"/>
           </p:cNvPicPr>
@@ -11280,7 +11335,7 @@
                 <a:ea typeface="Calibri"/>
                 <a:cs typeface="Calibri"/>
               </a:rPr>
-              <a:t>Arbetsgång: Svara att orsaken ska utredas enligt instruktionen. Beskriv inte hur förreglingen kan förbikopplas.</a:t>
+              <a:t>Arbetsgång: Tänk på vad en förregling är till för. Vad gör du innan du försöker igen? Beskriv inte hur förreglingen kan förbikopplas.</a:t>
             </a:r>
           </a:p>
         </p:txBody>
@@ -13128,7 +13183,7 @@
                 <a:ea typeface="Calibri"/>
                 <a:cs typeface="Calibri"/>
               </a:rPr>
-              <a:t>Utan schema över matningar och källor vet du inte hur anläggningen är kopplad eller om spänningen kan komma tillbaka.</a:t>
+              <a:t>Ett enlinjeschema visar hur anläggningen matas. Uppgiften om reservmatning visar om det finns fler källor.</a:t>
             </a:r>
           </a:p>
         </p:txBody>
@@ -13519,7 +13574,7 @@
                 <a:ea typeface="Calibri"/>
                 <a:cs typeface="Calibri"/>
               </a:rPr>
-              <a:t>Till ett arbete i en högspänningsanläggning finns varken enlinjeschema eller uppgift om reservmatning. Vilka två osäkerheter uppstår?</a:t>
+              <a:t>Du ska arbeta i en högspänningsanläggning. Det finns inget enlinjeschema. Ingen vet om det finns reservmatning. Vilka två saker kan du då inte veta säkert?</a:t>
             </a:r>
           </a:p>
         </p:txBody>
@@ -13852,7 +13907,7 @@
                 <a:ea typeface="Calibri"/>
                 <a:cs typeface="Calibri"/>
               </a:rPr>
-              <a:t>Reläinställningar, mätvärden och i vilken ordning brytarna löste visar vad som hände.</a:t>
+              <a:t>Selektivitet betyder att bara skyddet närmast felet ska lösa ut. Här löste fler skydd.</a:t>
             </a:r>
           </a:p>
         </p:txBody>
@@ -14243,7 +14298,7 @@
                 <a:ea typeface="Calibri"/>
                 <a:cs typeface="Calibri"/>
               </a:rPr>
-              <a:t>Ett fel på ett ställe gör att två felfria fördelningar slocknar. Vad bör utredas?</a:t>
+              <a:t>Det blir ett fel på ett ställe. Ändå blir två andra fördelningar strömlösa, fast de är hela. Vilka uppgifter behöver du för att ta reda på varför?</a:t>
             </a:r>
           </a:p>
         </p:txBody>

--- a/sjoskolan/vecka-44/aktuell/v44_02_Hogspanningssystem_elev.pptx
+++ b/sjoskolan/vecka-44/aktuell/v44_02_Hogspanningssystem_elev.pptx
@@ -7053,7 +7053,7 @@
                 </a:solidFill>
                 <a:latin typeface="Calibri"/>
               </a:rPr>
-              <a:t>1. Läs del 2 på delsidan: teorin och de två exemplen.</a:t>
+              <a:t>1. Läs del 2 på delsidan: teorin och de två exemplen. Tryck på ”Jag har läst del 2” längst ned på sidan.</a:t>
             </a:r>
           </a:p>
           <a:p>

--- a/sjoskolan/vecka-44/aktuell/v44_02_Hogspanningssystem_elev.pptx
+++ b/sjoskolan/vecka-44/aktuell/v44_02_Hogspanningssystem_elev.pptx
@@ -7110,7 +7110,7 @@
                 </a:solidFill>
                 <a:latin typeface="Calibri"/>
               </a:rPr>
-              <a:t>Inlämningen och analysen av mätdata senast fredag 30 oktober. Allt finns på veckosidan.</a:t>
+              <a:t>Inlämningen, uppgift 1–4, senast fredag 30 oktober. Allt finns på veckosidan.</a:t>
             </a:r>
           </a:p>
         </p:txBody>
@@ -7405,7 +7405,7 @@
                 </a:solidFill>
                 <a:latin typeface="Calibri"/>
               </a:rPr>
-              <a:t>Studieplanen YH03151, 18 september 2026: Elteknik och ellära, lärandemål 1, 2 och 3</a:t>
+              <a:t>Kursplanen för Elteknik och ellära, lärandemål 1, 2 och 3</a:t>
             </a:r>
           </a:p>
         </p:txBody>
